--- a/docs/Thesis/Splatt3R-SLAM-defense.pptx
+++ b/docs/Thesis/Splatt3R-SLAM-defense.pptx
@@ -46374,29 +46374,36 @@
         </p:nvSpPr>
         <p:spPr>
           <a:xfrm>
-            <a:off x="320040" y="109728"/>
-            <a:ext cx="7955279" cy="329184"/>
-          </a:xfrm>
-          <a:prstGeom prst="rect">
-            <a:avLst/>
-          </a:prstGeom>
-          <a:noFill/>
-        </p:spPr>
-        <p:txBody>
-          <a:bodyPr wrap="none" lIns="27432" rIns="27432" tIns="9144" bIns="9144" anchor="ctr">
-            <a:spAutoFit/>
-          </a:bodyPr>
-          <a:lstStyle/>
-          <a:p>
-            <a:pPr algn="l"/>
-            <a:r>
-              <a:rPr sz="1900" b="1">
-                <a:solidFill>
-                  <a:srgbClr val="18323F"/>
-                </a:solidFill>
-                <a:latin typeface="Arial"/>
-              </a:rPr>
-              <a:t>Predict, anchor, refine</a:t>
+            <a:off x="372000" y="439020"/>
+            <a:ext cx="1274335" cy="276762"/>
+          </a:xfrm>
+          <a:prstGeom prst="rect">
+            <a:avLst/>
+          </a:prstGeom>
+          <a:noFill/>
+        </p:spPr>
+        <p:txBody>
+          <a:bodyPr wrap="none" lIns="0" rIns="0" tIns="0" bIns="0" anchor="ctr">
+            <a:spAutoFit/>
+          </a:bodyPr>
+          <a:lstStyle/>
+          <a:p>
+            <a:pPr algn="l">
+              <a:spcBef>
+                <a:spcPts val="0"/>
+              </a:spcBef>
+              <a:spcAft>
+                <a:spcPts val="0"/>
+              </a:spcAft>
+            </a:pPr>
+            <a:r>
+              <a:rPr sz="1602" b="1">
+                <a:solidFill>
+                  <a:srgbClr val="20282C"/>
+                </a:solidFill>
+                <a:latin typeface="DejaVu Sans"/>
+              </a:rPr>
+              <a:t>(a) Predict</a:t>
             </a:r>
           </a:p>
         </p:txBody>
@@ -46409,68 +46416,82 @@
         </p:nvSpPr>
         <p:spPr>
           <a:xfrm>
-            <a:off x="8412480" y="128016"/>
-            <a:ext cx="3429000" cy="256032"/>
-          </a:xfrm>
-          <a:prstGeom prst="rect">
-            <a:avLst/>
-          </a:prstGeom>
-          <a:noFill/>
-        </p:spPr>
-        <p:txBody>
-          <a:bodyPr wrap="none" lIns="27432" rIns="27432" tIns="9144" bIns="9144" anchor="ctr">
-            <a:spAutoFit/>
-          </a:bodyPr>
-          <a:lstStyle/>
-          <a:p>
-            <a:pPr algn="r"/>
-            <a:r>
-              <a:rPr sz="900" b="0">
-                <a:solidFill>
-                  <a:srgbClr val="607681"/>
-                </a:solidFill>
-                <a:latin typeface="Arial"/>
-              </a:rPr>
-              <a:t>Thesis method navigation</a:t>
-            </a:r>
-          </a:p>
-        </p:txBody>
-      </p:sp>
-      <p:cxnSp>
-        <p:nvCxnSpPr>
-          <p:cNvPr id="4" name="Connector 3"/>
-          <p:cNvCxnSpPr/>
-          <p:nvPr/>
-        </p:nvCxnSpPr>
-        <p:spPr>
-          <a:xfrm>
-            <a:off x="320040" y="502920"/>
-            <a:ext cx="11548872" cy="0"/>
-          </a:xfrm>
-          <a:prstGeom prst="line">
-            <a:avLst/>
-          </a:prstGeom>
-          <a:ln w="10160">
-            <a:solidFill>
-              <a:srgbClr val="CAD6DA"/>
-            </a:solidFill>
-          </a:ln>
-        </p:spPr>
-        <p:style>
-          <a:lnRef idx="2">
-            <a:schemeClr val="accent1"/>
-          </a:lnRef>
-          <a:fillRef idx="0">
-            <a:schemeClr val="accent1"/>
-          </a:fillRef>
-          <a:effectRef idx="1">
-            <a:schemeClr val="accent1"/>
-          </a:effectRef>
-          <a:fontRef idx="minor">
-            <a:schemeClr val="tx1"/>
-          </a:fontRef>
-        </p:style>
-      </p:cxnSp>
+            <a:off x="372000" y="803967"/>
+            <a:ext cx="1385217" cy="230635"/>
+          </a:xfrm>
+          <a:prstGeom prst="rect">
+            <a:avLst/>
+          </a:prstGeom>
+          <a:noFill/>
+        </p:spPr>
+        <p:txBody>
+          <a:bodyPr wrap="none" lIns="0" rIns="0" tIns="0" bIns="0" anchor="ctr">
+            <a:spAutoFit/>
+          </a:bodyPr>
+          <a:lstStyle/>
+          <a:p>
+            <a:pPr algn="l">
+              <a:spcBef>
+                <a:spcPts val="0"/>
+              </a:spcBef>
+              <a:spcAft>
+                <a:spcPts val="0"/>
+              </a:spcAft>
+            </a:pPr>
+            <a:r>
+              <a:rPr sz="1335" b="0">
+                <a:solidFill>
+                  <a:srgbClr val="59636A"/>
+                </a:solidFill>
+                <a:latin typeface="DejaVu Sans"/>
+              </a:rPr>
+              <a:t>Ch. 2 · Eq. (2.7)</a:t>
+            </a:r>
+          </a:p>
+        </p:txBody>
+      </p:sp>
+      <p:sp>
+        <p:nvSpPr>
+          <p:cNvPr id="4" name="TextBox 3"/>
+          <p:cNvSpPr txBox="1"/>
+          <p:nvPr/>
+        </p:nvSpPr>
+        <p:spPr>
+          <a:xfrm>
+            <a:off x="4393199" y="439020"/>
+            <a:ext cx="1273890" cy="276762"/>
+          </a:xfrm>
+          <a:prstGeom prst="rect">
+            <a:avLst/>
+          </a:prstGeom>
+          <a:noFill/>
+        </p:spPr>
+        <p:txBody>
+          <a:bodyPr wrap="none" lIns="0" rIns="0" tIns="0" bIns="0" anchor="ctr">
+            <a:spAutoFit/>
+          </a:bodyPr>
+          <a:lstStyle/>
+          <a:p>
+            <a:pPr algn="l">
+              <a:spcBef>
+                <a:spcPts val="0"/>
+              </a:spcBef>
+              <a:spcAft>
+                <a:spcPts val="0"/>
+              </a:spcAft>
+            </a:pPr>
+            <a:r>
+              <a:rPr sz="1602" b="1">
+                <a:solidFill>
+                  <a:srgbClr val="20282C"/>
+                </a:solidFill>
+                <a:latin typeface="DejaVu Sans"/>
+              </a:rPr>
+              <a:t>(b) Anchor</a:t>
+            </a:r>
+          </a:p>
+        </p:txBody>
+      </p:sp>
       <p:sp>
         <p:nvSpPr>
           <p:cNvPr id="5" name="TextBox 4"/>
@@ -46479,36 +46500,171 @@
         </p:nvSpPr>
         <p:spPr>
           <a:xfrm>
-            <a:off x="320040" y="658368"/>
-            <a:ext cx="1828800" cy="228600"/>
-          </a:xfrm>
-          <a:prstGeom prst="rect">
-            <a:avLst/>
-          </a:prstGeom>
-          <a:noFill/>
-        </p:spPr>
-        <p:txBody>
-          <a:bodyPr wrap="none" lIns="27432" rIns="27432" tIns="9144" bIns="9144" anchor="ctr">
-            <a:spAutoFit/>
-          </a:bodyPr>
-          <a:lstStyle/>
-          <a:p>
-            <a:pPr algn="l"/>
-            <a:r>
-              <a:rPr sz="1100" b="1">
-                <a:solidFill>
-                  <a:srgbClr val="3478A5"/>
-                </a:solidFill>
-                <a:latin typeface="Arial"/>
-              </a:rPr>
-              <a:t>1  IMAGE PAIR</a:t>
-            </a:r>
+            <a:off x="4393199" y="803967"/>
+            <a:ext cx="1828046" cy="230635"/>
+          </a:xfrm>
+          <a:prstGeom prst="rect">
+            <a:avLst/>
+          </a:prstGeom>
+          <a:noFill/>
+        </p:spPr>
+        <p:txBody>
+          <a:bodyPr wrap="none" lIns="0" rIns="0" tIns="0" bIns="0" anchor="ctr">
+            <a:spAutoFit/>
+          </a:bodyPr>
+          <a:lstStyle/>
+          <a:p>
+            <a:pPr algn="l">
+              <a:spcBef>
+                <a:spcPts val="0"/>
+              </a:spcBef>
+              <a:spcAft>
+                <a:spcPts val="0"/>
+              </a:spcAft>
+            </a:pPr>
+            <a:r>
+              <a:rPr sz="1335" b="0">
+                <a:solidFill>
+                  <a:srgbClr val="59636A"/>
+                </a:solidFill>
+                <a:latin typeface="DejaVu Sans"/>
+              </a:rPr>
+              <a:t>Ch. 4 · Eqs. (4.1–4.3)</a:t>
+            </a:r>
+          </a:p>
+        </p:txBody>
+      </p:sp>
+      <p:sp>
+        <p:nvSpPr>
+          <p:cNvPr id="6" name="TextBox 5"/>
+          <p:cNvSpPr txBox="1"/>
+          <p:nvPr/>
+        </p:nvSpPr>
+        <p:spPr>
+          <a:xfrm>
+            <a:off x="8039954" y="439020"/>
+            <a:ext cx="1160024" cy="276762"/>
+          </a:xfrm>
+          <a:prstGeom prst="rect">
+            <a:avLst/>
+          </a:prstGeom>
+          <a:noFill/>
+        </p:spPr>
+        <p:txBody>
+          <a:bodyPr wrap="none" lIns="0" rIns="0" tIns="0" bIns="0" anchor="ctr">
+            <a:spAutoFit/>
+          </a:bodyPr>
+          <a:lstStyle/>
+          <a:p>
+            <a:pPr algn="l">
+              <a:spcBef>
+                <a:spcPts val="0"/>
+              </a:spcBef>
+              <a:spcAft>
+                <a:spcPts val="0"/>
+              </a:spcAft>
+            </a:pPr>
+            <a:r>
+              <a:rPr sz="1602" b="1">
+                <a:solidFill>
+                  <a:srgbClr val="20282C"/>
+                </a:solidFill>
+                <a:latin typeface="DejaVu Sans"/>
+              </a:rPr>
+              <a:t>(c) Refine</a:t>
+            </a:r>
+          </a:p>
+        </p:txBody>
+      </p:sp>
+      <p:sp>
+        <p:nvSpPr>
+          <p:cNvPr id="7" name="TextBox 6"/>
+          <p:cNvSpPr txBox="1"/>
+          <p:nvPr/>
+        </p:nvSpPr>
+        <p:spPr>
+          <a:xfrm>
+            <a:off x="8039954" y="803967"/>
+            <a:ext cx="1385217" cy="230635"/>
+          </a:xfrm>
+          <a:prstGeom prst="rect">
+            <a:avLst/>
+          </a:prstGeom>
+          <a:noFill/>
+        </p:spPr>
+        <p:txBody>
+          <a:bodyPr wrap="none" lIns="0" rIns="0" tIns="0" bIns="0" anchor="ctr">
+            <a:spAutoFit/>
+          </a:bodyPr>
+          <a:lstStyle/>
+          <a:p>
+            <a:pPr algn="l">
+              <a:spcBef>
+                <a:spcPts val="0"/>
+              </a:spcBef>
+              <a:spcAft>
+                <a:spcPts val="0"/>
+              </a:spcAft>
+            </a:pPr>
+            <a:r>
+              <a:rPr sz="1335" b="0">
+                <a:solidFill>
+                  <a:srgbClr val="59636A"/>
+                </a:solidFill>
+                <a:latin typeface="DejaVu Sans"/>
+              </a:rPr>
+              <a:t>Ch. 7 · Eq. (7.1)</a:t>
+            </a:r>
+          </a:p>
+        </p:txBody>
+      </p:sp>
+      <p:sp>
+        <p:nvSpPr>
+          <p:cNvPr id="8" name="Freeform 7"/>
+          <p:cNvSpPr/>
+          <p:nvPr/>
+        </p:nvSpPr>
+        <p:spPr>
+          <a:xfrm>
+            <a:off x="372000" y="1114647"/>
+            <a:ext cx="11444951" cy="0"/>
+          </a:xfrm>
+          <a:custGeom>
+            <a:avLst/>
+            <a:gdLst/>
+            <a:ahLst/>
+            <a:cxnLst/>
+            <a:rect l="l" t="t" r="r" b="b"/>
+            <a:pathLst>
+              <a:path w="11444951" h="0">
+                <a:moveTo>
+                  <a:pt x="0" y="0"/>
+                </a:moveTo>
+                <a:lnTo>
+                  <a:pt x="11444951" y="0"/>
+                </a:lnTo>
+              </a:path>
+            </a:pathLst>
+          </a:custGeom>
+          <a:noFill/>
+          <a:ln w="11305">
+            <a:solidFill>
+              <a:srgbClr val="C5CBCF"/>
+            </a:solidFill>
+          </a:ln>
+          <a:effectLst/>
+        </p:spPr>
+        <p:txBody>
+          <a:bodyPr rtlCol="0" anchor="ctr"/>
+          <a:lstStyle/>
+          <a:p>
+            <a:pPr algn="ctr"/>
           </a:p>
         </p:txBody>
       </p:sp>
       <p:pic>
         <p:nvPicPr>
-          <p:cNvPr id="6" name="Picture 5" descr="view0_gt.png"/>
+          <p:cNvPr id="9" name="Picture 8" descr="view0_gt.png"/>
           <p:cNvPicPr>
             <a:picLocks noChangeAspect="1"/>
           </p:cNvPicPr>
@@ -46516,29 +46672,23 @@
         </p:nvPicPr>
         <p:blipFill>
           <a:blip r:embed="rId2"/>
-          <a:srcRect t="211" b="211"/>
           <a:stretch>
             <a:fillRect/>
           </a:stretch>
         </p:blipFill>
         <p:spPr>
           <a:xfrm>
-            <a:off x="320040" y="941832"/>
-            <a:ext cx="1444752" cy="1078992"/>
-          </a:xfrm>
-          <a:prstGeom prst="rect">
-            <a:avLst/>
-          </a:prstGeom>
-          <a:ln w="10160">
-            <a:solidFill>
-              <a:srgbClr val="3478A5"/>
-            </a:solidFill>
-          </a:ln>
+            <a:off x="372000" y="1489090"/>
+            <a:ext cx="1107050" cy="830287"/>
+          </a:xfrm>
+          <a:prstGeom prst="rect">
+            <a:avLst/>
+          </a:prstGeom>
         </p:spPr>
       </p:pic>
       <p:pic>
         <p:nvPicPr>
-          <p:cNvPr id="7" name="Picture 6" descr="view1_gt.png"/>
+          <p:cNvPr id="10" name="Picture 9" descr="view1_gt.png"/>
           <p:cNvPicPr>
             <a:picLocks noChangeAspect="1"/>
           </p:cNvPicPr>
@@ -46546,917 +46696,86 @@
         </p:nvPicPr>
         <p:blipFill>
           <a:blip r:embed="rId3"/>
-          <a:srcRect t="211" b="211"/>
           <a:stretch>
             <a:fillRect/>
           </a:stretch>
         </p:blipFill>
         <p:spPr>
           <a:xfrm>
-            <a:off x="658368" y="1490472"/>
-            <a:ext cx="1444752" cy="1078992"/>
-          </a:xfrm>
-          <a:prstGeom prst="rect">
-            <a:avLst/>
-          </a:prstGeom>
-          <a:ln w="10160">
-            <a:solidFill>
-              <a:srgbClr val="168077"/>
-            </a:solidFill>
-          </a:ln>
+            <a:off x="372000" y="2579861"/>
+            <a:ext cx="1107050" cy="830287"/>
+          </a:xfrm>
+          <a:prstGeom prst="rect">
+            <a:avLst/>
+          </a:prstGeom>
         </p:spPr>
       </p:pic>
       <p:sp>
         <p:nvSpPr>
-          <p:cNvPr id="8" name="TextBox 7"/>
-          <p:cNvSpPr txBox="1"/>
-          <p:nvPr/>
-        </p:nvSpPr>
-        <p:spPr>
-          <a:xfrm>
-            <a:off x="320040" y="2670048"/>
-            <a:ext cx="1783080" cy="310896"/>
-          </a:xfrm>
-          <a:prstGeom prst="rect">
-            <a:avLst/>
-          </a:prstGeom>
-          <a:noFill/>
-        </p:spPr>
-        <p:txBody>
-          <a:bodyPr wrap="none" lIns="27432" rIns="27432" tIns="9144" bIns="9144" anchor="ctr">
-            <a:spAutoFit/>
-          </a:bodyPr>
-          <a:lstStyle/>
-          <a:p>
-            <a:pPr algn="ctr"/>
-            <a:r>
-              <a:rPr sz="900" b="0">
-                <a:solidFill>
-                  <a:srgbClr val="607681"/>
-                </a:solidFill>
-                <a:latin typeface="Arial"/>
-              </a:rPr>
-              <a:t>current frame + keyframe</a:t>
-            </a:r>
-          </a:p>
-        </p:txBody>
-      </p:sp>
-      <p:cxnSp>
-        <p:nvCxnSpPr>
-          <p:cNvPr id="9" name="Connector 8"/>
-          <p:cNvCxnSpPr/>
-          <p:nvPr/>
-        </p:nvCxnSpPr>
-        <p:spPr>
-          <a:xfrm>
-            <a:off x="2176272" y="1691640"/>
-            <a:ext cx="292608" cy="0"/>
-          </a:xfrm>
-          <a:prstGeom prst="line">
-            <a:avLst/>
-          </a:prstGeom>
-          <a:ln w="20320">
-            <a:solidFill>
-              <a:srgbClr val="3478A5"/>
-            </a:solidFill>
-          </a:ln>
-        </p:spPr>
-        <p:style>
-          <a:lnRef idx="2">
-            <a:schemeClr val="accent1"/>
-          </a:lnRef>
-          <a:fillRef idx="0">
-            <a:schemeClr val="accent1"/>
-          </a:fillRef>
-          <a:effectRef idx="1">
-            <a:schemeClr val="accent1"/>
-          </a:effectRef>
-          <a:fontRef idx="minor">
-            <a:schemeClr val="tx1"/>
-          </a:fontRef>
-        </p:style>
-      </p:cxnSp>
-      <p:sp>
-        <p:nvSpPr>
-          <p:cNvPr id="10" name="Isosceles Triangle 9"/>
+          <p:cNvPr id="11" name="TextBox 10"/>
+          <p:cNvSpPr txBox="1"/>
+          <p:nvPr/>
+        </p:nvSpPr>
+        <p:spPr>
+          <a:xfrm>
+            <a:off x="402202" y="1173798"/>
+            <a:ext cx="1014086" cy="239860"/>
+          </a:xfrm>
+          <a:prstGeom prst="rect">
+            <a:avLst/>
+          </a:prstGeom>
+          <a:noFill/>
+        </p:spPr>
+        <p:txBody>
+          <a:bodyPr wrap="none" lIns="0" rIns="0" tIns="0" bIns="0" anchor="ctr">
+            <a:spAutoFit/>
+          </a:bodyPr>
+          <a:lstStyle/>
+          <a:p>
+            <a:pPr algn="ctr">
+              <a:spcBef>
+                <a:spcPts val="0"/>
+              </a:spcBef>
+              <a:spcAft>
+                <a:spcPts val="0"/>
+              </a:spcAft>
+            </a:pPr>
+            <a:r>
+              <a:rPr sz="1388" b="0">
+                <a:solidFill>
+                  <a:srgbClr val="20282C"/>
+                </a:solidFill>
+                <a:latin typeface="DejaVu Sans"/>
+              </a:rPr>
+              <a:t>Image pair</a:t>
+            </a:r>
+          </a:p>
+        </p:txBody>
+      </p:sp>
+      <p:sp>
+        <p:nvSpPr>
+          <p:cNvPr id="12" name="Rectangle 11"/>
           <p:cNvSpPr/>
           <p:nvPr/>
         </p:nvSpPr>
         <p:spPr>
-          <a:xfrm rot="5400000">
-            <a:off x="2418588" y="1641348"/>
-            <a:ext cx="100584" cy="100584"/>
-          </a:xfrm>
-          <a:prstGeom prst="triangle">
-            <a:avLst/>
-          </a:prstGeom>
-          <a:solidFill>
-            <a:srgbClr val="3478A5"/>
-          </a:solidFill>
-          <a:ln>
-            <a:noFill/>
-          </a:ln>
-        </p:spPr>
-        <p:style>
-          <a:lnRef idx="1">
-            <a:schemeClr val="accent1"/>
-          </a:lnRef>
-          <a:fillRef idx="3">
-            <a:schemeClr val="accent1"/>
-          </a:fillRef>
-          <a:effectRef idx="2">
-            <a:schemeClr val="accent1"/>
-          </a:effectRef>
-          <a:fontRef idx="minor">
-            <a:schemeClr val="lt1"/>
-          </a:fontRef>
-        </p:style>
-        <p:txBody>
-          <a:bodyPr rtlCol="0" anchor="ctr"/>
-          <a:lstStyle/>
-          <a:p>
-            <a:pPr algn="ctr"/>
-          </a:p>
-        </p:txBody>
-      </p:sp>
-      <p:sp>
-        <p:nvSpPr>
-          <p:cNvPr id="11" name="Rounded Rectangle 10"/>
-          <p:cNvSpPr/>
-          <p:nvPr/>
-        </p:nvSpPr>
-        <p:spPr>
-          <a:xfrm>
-            <a:off x="2487168" y="941832"/>
-            <a:ext cx="1938528" cy="1481328"/>
-          </a:xfrm>
-          <a:prstGeom prst="roundRect">
-            <a:avLst>
-              <a:gd name="adj" fmla="val 8000"/>
-            </a:avLst>
-          </a:prstGeom>
-          <a:solidFill>
-            <a:srgbClr val="EAF3F8"/>
-          </a:solidFill>
-          <a:ln w="12700">
-            <a:solidFill>
-              <a:srgbClr val="3478A5"/>
-            </a:solidFill>
-          </a:ln>
-        </p:spPr>
-        <p:style>
-          <a:lnRef idx="1">
-            <a:schemeClr val="accent1"/>
-          </a:lnRef>
-          <a:fillRef idx="3">
-            <a:schemeClr val="accent1"/>
-          </a:fillRef>
-          <a:effectRef idx="2">
-            <a:schemeClr val="accent1"/>
-          </a:effectRef>
-          <a:fontRef idx="minor">
-            <a:schemeClr val="lt1"/>
-          </a:fontRef>
-        </p:style>
-        <p:txBody>
-          <a:bodyPr rtlCol="0" anchor="ctr"/>
-          <a:lstStyle/>
-          <a:p>
-            <a:pPr algn="ctr"/>
-          </a:p>
-        </p:txBody>
-      </p:sp>
-      <p:sp>
-        <p:nvSpPr>
-          <p:cNvPr id="12" name="TextBox 11"/>
-          <p:cNvSpPr txBox="1"/>
-          <p:nvPr/>
-        </p:nvSpPr>
-        <p:spPr>
-          <a:xfrm>
-            <a:off x="2596896" y="1014984"/>
-            <a:ext cx="1719072" cy="256032"/>
-          </a:xfrm>
-          <a:prstGeom prst="rect">
-            <a:avLst/>
-          </a:prstGeom>
-          <a:noFill/>
-        </p:spPr>
-        <p:txBody>
-          <a:bodyPr wrap="none" lIns="27432" rIns="27432" tIns="9144" bIns="9144" anchor="ctr">
-            <a:spAutoFit/>
-          </a:bodyPr>
-          <a:lstStyle/>
-          <a:p>
-            <a:pPr algn="l"/>
-            <a:r>
-              <a:rPr sz="1200" b="1">
-                <a:solidFill>
-                  <a:srgbClr val="18323F"/>
-                </a:solidFill>
-                <a:latin typeface="Arial"/>
-              </a:rPr>
-              <a:t>Shared predictor</a:t>
-            </a:r>
-          </a:p>
-        </p:txBody>
-      </p:sp>
-      <p:sp>
-        <p:nvSpPr>
-          <p:cNvPr id="13" name="TextBox 12"/>
-          <p:cNvSpPr txBox="1"/>
-          <p:nvPr/>
-        </p:nvSpPr>
-        <p:spPr>
-          <a:xfrm>
-            <a:off x="2596896" y="1298448"/>
-            <a:ext cx="1719072" cy="1069848"/>
-          </a:xfrm>
-          <a:prstGeom prst="rect">
-            <a:avLst/>
-          </a:prstGeom>
-          <a:noFill/>
-        </p:spPr>
-        <p:txBody>
-          <a:bodyPr wrap="none" lIns="27432" rIns="27432" tIns="9144" bIns="9144" anchor="t">
-            <a:spAutoFit/>
-          </a:bodyPr>
-          <a:lstStyle/>
-          <a:p>
-            <a:pPr algn="l"/>
-            <a:r>
-              <a:rPr sz="869" b="0">
-                <a:solidFill>
-                  <a:srgbClr val="607681"/>
-                </a:solidFill>
-                <a:latin typeface="Arial"/>
-              </a:rPr>
-              <a:t>Frozen MASt3R features
-Pointmap + matching
-Gaussian DPT head</a:t>
-            </a:r>
-          </a:p>
-        </p:txBody>
-      </p:sp>
-      <p:sp>
-        <p:nvSpPr>
-          <p:cNvPr id="14" name="TextBox 13"/>
-          <p:cNvSpPr txBox="1"/>
-          <p:nvPr/>
-        </p:nvSpPr>
-        <p:spPr>
-          <a:xfrm>
-            <a:off x="2578608" y="2514600"/>
-            <a:ext cx="1783080" cy="292608"/>
-          </a:xfrm>
-          <a:prstGeom prst="rect">
-            <a:avLst/>
-          </a:prstGeom>
-          <a:noFill/>
-        </p:spPr>
-        <p:txBody>
-          <a:bodyPr wrap="none" lIns="27432" rIns="27432" tIns="9144" bIns="9144" anchor="ctr">
-            <a:spAutoFit/>
-          </a:bodyPr>
-          <a:lstStyle/>
-          <a:p>
-            <a:pPr algn="ctr"/>
-            <a:r>
-              <a:rPr sz="850" b="1">
-                <a:solidFill>
-                  <a:srgbClr val="3478A5"/>
-                </a:solidFill>
-                <a:latin typeface="Arial"/>
-              </a:rPr>
-              <a:t>Ch. 2 / Eq. (2.7)</a:t>
-            </a:r>
-          </a:p>
-        </p:txBody>
-      </p:sp>
-      <p:cxnSp>
-        <p:nvCxnSpPr>
-          <p:cNvPr id="15" name="Connector 14"/>
-          <p:cNvCxnSpPr/>
-          <p:nvPr/>
-        </p:nvCxnSpPr>
-        <p:spPr>
-          <a:xfrm>
-            <a:off x="4425696" y="1344168"/>
-            <a:ext cx="310896" cy="0"/>
-          </a:xfrm>
-          <a:prstGeom prst="line">
-            <a:avLst/>
-          </a:prstGeom>
-          <a:ln w="20320">
-            <a:solidFill>
-              <a:srgbClr val="3478A5"/>
-            </a:solidFill>
-          </a:ln>
-        </p:spPr>
-        <p:style>
-          <a:lnRef idx="2">
-            <a:schemeClr val="accent1"/>
-          </a:lnRef>
-          <a:fillRef idx="0">
-            <a:schemeClr val="accent1"/>
-          </a:fillRef>
-          <a:effectRef idx="1">
-            <a:schemeClr val="accent1"/>
-          </a:effectRef>
-          <a:fontRef idx="minor">
-            <a:schemeClr val="tx1"/>
-          </a:fontRef>
-        </p:style>
-      </p:cxnSp>
-      <p:sp>
-        <p:nvSpPr>
-          <p:cNvPr id="16" name="Isosceles Triangle 15"/>
-          <p:cNvSpPr/>
-          <p:nvPr/>
-        </p:nvSpPr>
-        <p:spPr>
-          <a:xfrm rot="5400000">
-            <a:off x="4686300" y="1293876"/>
-            <a:ext cx="100584" cy="100584"/>
-          </a:xfrm>
-          <a:prstGeom prst="triangle">
-            <a:avLst/>
-          </a:prstGeom>
-          <a:solidFill>
-            <a:srgbClr val="3478A5"/>
-          </a:solidFill>
-          <a:ln>
-            <a:noFill/>
-          </a:ln>
-        </p:spPr>
-        <p:style>
-          <a:lnRef idx="1">
-            <a:schemeClr val="accent1"/>
-          </a:lnRef>
-          <a:fillRef idx="3">
-            <a:schemeClr val="accent1"/>
-          </a:fillRef>
-          <a:effectRef idx="2">
-            <a:schemeClr val="accent1"/>
-          </a:effectRef>
-          <a:fontRef idx="minor">
-            <a:schemeClr val="lt1"/>
-          </a:fontRef>
-        </p:style>
-        <p:txBody>
-          <a:bodyPr rtlCol="0" anchor="ctr"/>
-          <a:lstStyle/>
-          <a:p>
-            <a:pPr algn="ctr"/>
-          </a:p>
-        </p:txBody>
-      </p:sp>
-      <p:sp>
-        <p:nvSpPr>
-          <p:cNvPr id="17" name="Rounded Rectangle 16"/>
-          <p:cNvSpPr/>
-          <p:nvPr/>
-        </p:nvSpPr>
-        <p:spPr>
-          <a:xfrm>
-            <a:off x="4754880" y="841248"/>
-            <a:ext cx="2057400" cy="1024128"/>
-          </a:xfrm>
-          <a:prstGeom prst="roundRect">
-            <a:avLst>
-              <a:gd name="adj" fmla="val 8000"/>
-            </a:avLst>
-          </a:prstGeom>
-          <a:solidFill>
-            <a:srgbClr val="EAF3F8"/>
-          </a:solidFill>
-          <a:ln w="12700">
-            <a:solidFill>
-              <a:srgbClr val="3478A5"/>
-            </a:solidFill>
-          </a:ln>
-        </p:spPr>
-        <p:style>
-          <a:lnRef idx="1">
-            <a:schemeClr val="accent1"/>
-          </a:lnRef>
-          <a:fillRef idx="3">
-            <a:schemeClr val="accent1"/>
-          </a:fillRef>
-          <a:effectRef idx="2">
-            <a:schemeClr val="accent1"/>
-          </a:effectRef>
-          <a:fontRef idx="minor">
-            <a:schemeClr val="lt1"/>
-          </a:fontRef>
-        </p:style>
-        <p:txBody>
-          <a:bodyPr rtlCol="0" anchor="ctr"/>
-          <a:lstStyle/>
-          <a:p>
-            <a:pPr algn="ctr"/>
-          </a:p>
-        </p:txBody>
-      </p:sp>
-      <p:sp>
-        <p:nvSpPr>
-          <p:cNvPr id="18" name="TextBox 17"/>
-          <p:cNvSpPr txBox="1"/>
-          <p:nvPr/>
-        </p:nvSpPr>
-        <p:spPr>
-          <a:xfrm>
-            <a:off x="4864608" y="914400"/>
-            <a:ext cx="1837943" cy="256032"/>
-          </a:xfrm>
-          <a:prstGeom prst="rect">
-            <a:avLst/>
-          </a:prstGeom>
-          <a:noFill/>
-        </p:spPr>
-        <p:txBody>
-          <a:bodyPr wrap="none" lIns="27432" rIns="27432" tIns="9144" bIns="9144" anchor="ctr">
-            <a:spAutoFit/>
-          </a:bodyPr>
-          <a:lstStyle/>
-          <a:p>
-            <a:pPr algn="l"/>
-            <a:r>
-              <a:rPr sz="1200" b="1">
-                <a:solidFill>
-                  <a:srgbClr val="18323F"/>
-                </a:solidFill>
-                <a:latin typeface="Arial"/>
-              </a:rPr>
-              <a:t>Geometry lane</a:t>
-            </a:r>
-          </a:p>
-        </p:txBody>
-      </p:sp>
-      <p:sp>
-        <p:nvSpPr>
-          <p:cNvPr id="19" name="TextBox 18"/>
-          <p:cNvSpPr txBox="1"/>
-          <p:nvPr/>
-        </p:nvSpPr>
-        <p:spPr>
-          <a:xfrm>
-            <a:off x="4864608" y="1197864"/>
-            <a:ext cx="1837943" cy="612648"/>
-          </a:xfrm>
-          <a:prstGeom prst="rect">
-            <a:avLst/>
-          </a:prstGeom>
-          <a:noFill/>
-        </p:spPr>
-        <p:txBody>
-          <a:bodyPr wrap="none" lIns="27432" rIns="27432" tIns="9144" bIns="9144" anchor="t">
-            <a:spAutoFit/>
-          </a:bodyPr>
-          <a:lstStyle/>
-          <a:p>
-            <a:pPr algn="l"/>
-            <a:r>
-              <a:rPr sz="869" b="0">
-                <a:solidFill>
-                  <a:srgbClr val="607681"/>
-                </a:solidFill>
-                <a:latin typeface="Arial"/>
-              </a:rPr>
-              <a:t>tracking -&gt; keyframes -&gt; pose graph</a:t>
-            </a:r>
-          </a:p>
-        </p:txBody>
-      </p:sp>
-      <p:cxnSp>
-        <p:nvCxnSpPr>
-          <p:cNvPr id="20" name="Connector 19"/>
-          <p:cNvCxnSpPr/>
-          <p:nvPr/>
-        </p:nvCxnSpPr>
-        <p:spPr>
-          <a:xfrm>
-            <a:off x="4425696" y="2084831"/>
-            <a:ext cx="310896" cy="0"/>
-          </a:xfrm>
-          <a:prstGeom prst="line">
-            <a:avLst/>
-          </a:prstGeom>
-          <a:ln w="20320">
-            <a:solidFill>
-              <a:srgbClr val="168077"/>
-            </a:solidFill>
-          </a:ln>
-        </p:spPr>
-        <p:style>
-          <a:lnRef idx="2">
-            <a:schemeClr val="accent1"/>
-          </a:lnRef>
-          <a:fillRef idx="0">
-            <a:schemeClr val="accent1"/>
-          </a:fillRef>
-          <a:effectRef idx="1">
-            <a:schemeClr val="accent1"/>
-          </a:effectRef>
-          <a:fontRef idx="minor">
-            <a:schemeClr val="tx1"/>
-          </a:fontRef>
-        </p:style>
-      </p:cxnSp>
-      <p:sp>
-        <p:nvSpPr>
-          <p:cNvPr id="21" name="Isosceles Triangle 20"/>
-          <p:cNvSpPr/>
-          <p:nvPr/>
-        </p:nvSpPr>
-        <p:spPr>
-          <a:xfrm rot="5400000">
-            <a:off x="4686300" y="2034539"/>
-            <a:ext cx="100584" cy="100584"/>
-          </a:xfrm>
-          <a:prstGeom prst="triangle">
-            <a:avLst/>
-          </a:prstGeom>
-          <a:solidFill>
-            <a:srgbClr val="168077"/>
-          </a:solidFill>
-          <a:ln>
-            <a:noFill/>
-          </a:ln>
-        </p:spPr>
-        <p:style>
-          <a:lnRef idx="1">
-            <a:schemeClr val="accent1"/>
-          </a:lnRef>
-          <a:fillRef idx="3">
-            <a:schemeClr val="accent1"/>
-          </a:fillRef>
-          <a:effectRef idx="2">
-            <a:schemeClr val="accent1"/>
-          </a:effectRef>
-          <a:fontRef idx="minor">
-            <a:schemeClr val="lt1"/>
-          </a:fontRef>
-        </p:style>
-        <p:txBody>
-          <a:bodyPr rtlCol="0" anchor="ctr"/>
-          <a:lstStyle/>
-          <a:p>
-            <a:pPr algn="ctr"/>
-          </a:p>
-        </p:txBody>
-      </p:sp>
-      <p:sp>
-        <p:nvSpPr>
-          <p:cNvPr id="22" name="Rounded Rectangle 21"/>
-          <p:cNvSpPr/>
-          <p:nvPr/>
-        </p:nvSpPr>
-        <p:spPr>
-          <a:xfrm>
-            <a:off x="4754880" y="1965960"/>
-            <a:ext cx="2057400" cy="987552"/>
-          </a:xfrm>
-          <a:prstGeom prst="roundRect">
-            <a:avLst>
-              <a:gd name="adj" fmla="val 8000"/>
-            </a:avLst>
-          </a:prstGeom>
-          <a:solidFill>
-            <a:srgbClr val="E9F6F3"/>
-          </a:solidFill>
-          <a:ln w="12700">
-            <a:solidFill>
-              <a:srgbClr val="168077"/>
-            </a:solidFill>
-          </a:ln>
-        </p:spPr>
-        <p:style>
-          <a:lnRef idx="1">
-            <a:schemeClr val="accent1"/>
-          </a:lnRef>
-          <a:fillRef idx="3">
-            <a:schemeClr val="accent1"/>
-          </a:fillRef>
-          <a:effectRef idx="2">
-            <a:schemeClr val="accent1"/>
-          </a:effectRef>
-          <a:fontRef idx="minor">
-            <a:schemeClr val="lt1"/>
-          </a:fontRef>
-        </p:style>
-        <p:txBody>
-          <a:bodyPr rtlCol="0" anchor="ctr"/>
-          <a:lstStyle/>
-          <a:p>
-            <a:pPr algn="ctr"/>
-          </a:p>
-        </p:txBody>
-      </p:sp>
-      <p:sp>
-        <p:nvSpPr>
-          <p:cNvPr id="23" name="TextBox 22"/>
-          <p:cNvSpPr txBox="1"/>
-          <p:nvPr/>
-        </p:nvSpPr>
-        <p:spPr>
-          <a:xfrm>
-            <a:off x="4864608" y="2039112"/>
-            <a:ext cx="1837943" cy="256032"/>
-          </a:xfrm>
-          <a:prstGeom prst="rect">
-            <a:avLst/>
-          </a:prstGeom>
-          <a:noFill/>
-        </p:spPr>
-        <p:txBody>
-          <a:bodyPr wrap="none" lIns="27432" rIns="27432" tIns="9144" bIns="9144" anchor="ctr">
-            <a:spAutoFit/>
-          </a:bodyPr>
-          <a:lstStyle/>
-          <a:p>
-            <a:pPr algn="l"/>
-            <a:r>
-              <a:rPr sz="1200" b="1">
-                <a:solidFill>
-                  <a:srgbClr val="18323F"/>
-                </a:solidFill>
-                <a:latin typeface="Arial"/>
-              </a:rPr>
-              <a:t>Gaussian lane</a:t>
-            </a:r>
-          </a:p>
-        </p:txBody>
-      </p:sp>
-      <p:sp>
-        <p:nvSpPr>
-          <p:cNvPr id="24" name="TextBox 23"/>
-          <p:cNvSpPr txBox="1"/>
-          <p:nvPr/>
-        </p:nvSpPr>
-        <p:spPr>
-          <a:xfrm>
-            <a:off x="4864608" y="2322576"/>
-            <a:ext cx="1837943" cy="576072"/>
-          </a:xfrm>
-          <a:prstGeom prst="rect">
-            <a:avLst/>
-          </a:prstGeom>
-          <a:noFill/>
-        </p:spPr>
-        <p:txBody>
-          <a:bodyPr wrap="none" lIns="27432" rIns="27432" tIns="9144" bIns="9144" anchor="t">
-            <a:spAutoFit/>
-          </a:bodyPr>
-          <a:lstStyle/>
-          <a:p>
-            <a:pPr algn="l"/>
-            <a:r>
-              <a:rPr sz="869" b="0">
-                <a:solidFill>
-                  <a:srgbClr val="607681"/>
-                </a:solidFill>
-                <a:latin typeface="Arial"/>
-              </a:rPr>
-              <a:t>local means, shape, color, opacity</a:t>
-            </a:r>
-          </a:p>
-        </p:txBody>
-      </p:sp>
-      <p:cxnSp>
-        <p:nvCxnSpPr>
-          <p:cNvPr id="25" name="Connector 24"/>
-          <p:cNvCxnSpPr/>
-          <p:nvPr/>
-        </p:nvCxnSpPr>
-        <p:spPr>
-          <a:xfrm>
-            <a:off x="6839712" y="1417320"/>
-            <a:ext cx="283464" cy="0"/>
-          </a:xfrm>
-          <a:prstGeom prst="line">
-            <a:avLst/>
-          </a:prstGeom>
-          <a:ln w="20320">
-            <a:solidFill>
-              <a:srgbClr val="C36B31"/>
-            </a:solidFill>
-          </a:ln>
-        </p:spPr>
-        <p:style>
-          <a:lnRef idx="2">
-            <a:schemeClr val="accent1"/>
-          </a:lnRef>
-          <a:fillRef idx="0">
-            <a:schemeClr val="accent1"/>
-          </a:fillRef>
-          <a:effectRef idx="1">
-            <a:schemeClr val="accent1"/>
-          </a:effectRef>
-          <a:fontRef idx="minor">
-            <a:schemeClr val="tx1"/>
-          </a:fontRef>
-        </p:style>
-      </p:cxnSp>
-      <p:sp>
-        <p:nvSpPr>
-          <p:cNvPr id="26" name="Isosceles Triangle 25"/>
-          <p:cNvSpPr/>
-          <p:nvPr/>
-        </p:nvSpPr>
-        <p:spPr>
-          <a:xfrm rot="5400000">
-            <a:off x="7072884" y="1367028"/>
-            <a:ext cx="100584" cy="100584"/>
-          </a:xfrm>
-          <a:prstGeom prst="triangle">
-            <a:avLst/>
-          </a:prstGeom>
-          <a:solidFill>
-            <a:srgbClr val="C36B31"/>
-          </a:solidFill>
-          <a:ln>
-            <a:noFill/>
-          </a:ln>
-        </p:spPr>
-        <p:style>
-          <a:lnRef idx="1">
-            <a:schemeClr val="accent1"/>
-          </a:lnRef>
-          <a:fillRef idx="3">
-            <a:schemeClr val="accent1"/>
-          </a:fillRef>
-          <a:effectRef idx="2">
-            <a:schemeClr val="accent1"/>
-          </a:effectRef>
-          <a:fontRef idx="minor">
-            <a:schemeClr val="lt1"/>
-          </a:fontRef>
-        </p:style>
-        <p:txBody>
-          <a:bodyPr rtlCol="0" anchor="ctr"/>
-          <a:lstStyle/>
-          <a:p>
-            <a:pPr algn="ctr"/>
-          </a:p>
-        </p:txBody>
-      </p:sp>
-      <p:sp>
-        <p:nvSpPr>
-          <p:cNvPr id="27" name="Rounded Rectangle 26"/>
-          <p:cNvSpPr/>
-          <p:nvPr/>
-        </p:nvSpPr>
-        <p:spPr>
-          <a:xfrm>
-            <a:off x="7150608" y="841248"/>
-            <a:ext cx="1901952" cy="2112264"/>
-          </a:xfrm>
-          <a:prstGeom prst="roundRect">
-            <a:avLst>
-              <a:gd name="adj" fmla="val 8000"/>
-            </a:avLst>
-          </a:prstGeom>
-          <a:solidFill>
-            <a:srgbClr val="FBEFE8"/>
-          </a:solidFill>
-          <a:ln w="12700">
-            <a:solidFill>
-              <a:srgbClr val="C36B31"/>
-            </a:solidFill>
-          </a:ln>
-        </p:spPr>
-        <p:style>
-          <a:lnRef idx="1">
-            <a:schemeClr val="accent1"/>
-          </a:lnRef>
-          <a:fillRef idx="3">
-            <a:schemeClr val="accent1"/>
-          </a:fillRef>
-          <a:effectRef idx="2">
-            <a:schemeClr val="accent1"/>
-          </a:effectRef>
-          <a:fontRef idx="minor">
-            <a:schemeClr val="lt1"/>
-          </a:fontRef>
-        </p:style>
-        <p:txBody>
-          <a:bodyPr rtlCol="0" anchor="ctr"/>
-          <a:lstStyle/>
-          <a:p>
-            <a:pPr algn="ctr"/>
-          </a:p>
-        </p:txBody>
-      </p:sp>
-      <p:sp>
-        <p:nvSpPr>
-          <p:cNvPr id="28" name="TextBox 27"/>
-          <p:cNvSpPr txBox="1"/>
-          <p:nvPr/>
-        </p:nvSpPr>
-        <p:spPr>
-          <a:xfrm>
-            <a:off x="7260336" y="914400"/>
-            <a:ext cx="1682496" cy="256032"/>
-          </a:xfrm>
-          <a:prstGeom prst="rect">
-            <a:avLst/>
-          </a:prstGeom>
-          <a:noFill/>
-        </p:spPr>
-        <p:txBody>
-          <a:bodyPr wrap="none" lIns="27432" rIns="27432" tIns="9144" bIns="9144" anchor="ctr">
-            <a:spAutoFit/>
-          </a:bodyPr>
-          <a:lstStyle/>
-          <a:p>
-            <a:pPr algn="l"/>
-            <a:r>
-              <a:rPr sz="1200" b="1">
-                <a:solidFill>
-                  <a:srgbClr val="18323F"/>
-                </a:solidFill>
-                <a:latin typeface="Arial"/>
-              </a:rPr>
-              <a:t>Shared keyframe anchor</a:t>
-            </a:r>
-          </a:p>
-        </p:txBody>
-      </p:sp>
-      <p:sp>
-        <p:nvSpPr>
-          <p:cNvPr id="29" name="TextBox 28"/>
-          <p:cNvSpPr txBox="1"/>
-          <p:nvPr/>
-        </p:nvSpPr>
-        <p:spPr>
-          <a:xfrm>
-            <a:off x="7260336" y="1197864"/>
-            <a:ext cx="1682496" cy="1700784"/>
-          </a:xfrm>
-          <a:prstGeom prst="rect">
-            <a:avLst/>
-          </a:prstGeom>
-          <a:noFill/>
-        </p:spPr>
-        <p:txBody>
-          <a:bodyPr wrap="none" lIns="27432" rIns="27432" tIns="9144" bIns="9144" anchor="t">
-            <a:spAutoFit/>
-          </a:bodyPr>
-          <a:lstStyle/>
-          <a:p>
-            <a:pPr algn="l"/>
-            <a:r>
-              <a:rPr sz="869" b="0">
-                <a:solidFill>
-                  <a:srgbClr val="607681"/>
-                </a:solidFill>
-                <a:latin typeface="Arial"/>
-              </a:rPr>
-              <a:t>Current pose moves both:
-  local Gaussian map
-  supervision cameras</a:t>
-            </a:r>
-          </a:p>
-        </p:txBody>
-      </p:sp>
-      <p:sp>
-        <p:nvSpPr>
-          <p:cNvPr id="30" name="Trapezoid 29"/>
-          <p:cNvSpPr/>
-          <p:nvPr/>
-        </p:nvSpPr>
-        <p:spPr>
-          <a:xfrm rot="5400000">
-            <a:off x="7406640" y="2139696"/>
-            <a:ext cx="295351" cy="208483"/>
-          </a:xfrm>
-          <a:prstGeom prst="trapezoid">
+          <a:xfrm>
+            <a:off x="2000016" y="1993775"/>
+            <a:ext cx="1530334" cy="1123330"/>
+          </a:xfrm>
+          <a:prstGeom prst="rect">
             <a:avLst/>
           </a:prstGeom>
           <a:solidFill>
             <a:srgbClr val="FFFFFF"/>
           </a:solidFill>
-          <a:ln w="12700">
-            <a:solidFill>
-              <a:srgbClr val="C36B31"/>
-            </a:solidFill>
-          </a:ln>
-        </p:spPr>
-        <p:style>
-          <a:lnRef idx="1">
-            <a:schemeClr val="accent1"/>
-          </a:lnRef>
-          <a:fillRef idx="3">
-            <a:schemeClr val="accent1"/>
-          </a:fillRef>
-          <a:effectRef idx="2">
-            <a:schemeClr val="accent1"/>
-          </a:effectRef>
-          <a:fontRef idx="minor">
-            <a:schemeClr val="lt1"/>
-          </a:fontRef>
-        </p:style>
+          <a:ln w="15827">
+            <a:solidFill>
+              <a:srgbClr val="20282C"/>
+            </a:solidFill>
+          </a:ln>
+          <a:effectLst/>
+        </p:spPr>
         <p:txBody>
           <a:bodyPr rtlCol="0" anchor="ctr"/>
           <a:lstStyle/>
@@ -47465,76 +46784,229 @@
           </a:p>
         </p:txBody>
       </p:sp>
-      <p:cxnSp>
-        <p:nvCxnSpPr>
-          <p:cNvPr id="31" name="Connector 30"/>
-          <p:cNvCxnSpPr/>
-          <p:nvPr/>
-        </p:nvCxnSpPr>
-        <p:spPr>
-          <a:xfrm>
-            <a:off x="7554315" y="2243937"/>
-            <a:ext cx="225857" cy="0"/>
-          </a:xfrm>
-          <a:prstGeom prst="line">
-            <a:avLst/>
-          </a:prstGeom>
-          <a:ln w="12700">
-            <a:solidFill>
-              <a:srgbClr val="C36B31"/>
-            </a:solidFill>
-          </a:ln>
-        </p:spPr>
-        <p:style>
-          <a:lnRef idx="2">
-            <a:schemeClr val="accent1"/>
-          </a:lnRef>
-          <a:fillRef idx="0">
-            <a:schemeClr val="accent1"/>
-          </a:fillRef>
-          <a:effectRef idx="1">
-            <a:schemeClr val="accent1"/>
-          </a:effectRef>
-          <a:fontRef idx="minor">
-            <a:schemeClr val="tx1"/>
-          </a:fontRef>
-        </p:style>
-      </p:cxnSp>
-      <p:sp>
-        <p:nvSpPr>
-          <p:cNvPr id="32" name="Isosceles Triangle 31"/>
+      <p:sp>
+        <p:nvSpPr>
+          <p:cNvPr id="13" name="TextBox 12"/>
+          <p:cNvSpPr txBox="1"/>
+          <p:nvPr/>
+        </p:nvSpPr>
+        <p:spPr>
+          <a:xfrm>
+            <a:off x="2244991" y="2112982"/>
+            <a:ext cx="1040385" cy="510473"/>
+          </a:xfrm>
+          <a:prstGeom prst="rect">
+            <a:avLst/>
+          </a:prstGeom>
+          <a:noFill/>
+        </p:spPr>
+        <p:txBody>
+          <a:bodyPr wrap="none" lIns="0" rIns="0" tIns="0" bIns="0" anchor="ctr">
+            <a:spAutoFit/>
+          </a:bodyPr>
+          <a:lstStyle/>
+          <a:p>
+            <a:pPr algn="ctr">
+              <a:spcBef>
+                <a:spcPts val="0"/>
+              </a:spcBef>
+              <a:spcAft>
+                <a:spcPts val="0"/>
+              </a:spcAft>
+            </a:pPr>
+            <a:r>
+              <a:rPr sz="1477" b="1">
+                <a:solidFill>
+                  <a:srgbClr val="20282C"/>
+                </a:solidFill>
+                <a:latin typeface="DejaVu Sans"/>
+              </a:rPr>
+              <a:t>Shared</a:t>
+            </a:r>
+          </a:p>
+          <a:p>
+            <a:pPr algn="ctr">
+              <a:spcBef>
+                <a:spcPts val="0"/>
+              </a:spcBef>
+              <a:spcAft>
+                <a:spcPts val="0"/>
+              </a:spcAft>
+            </a:pPr>
+            <a:r>
+              <a:rPr sz="1477" b="1">
+                <a:solidFill>
+                  <a:srgbClr val="20282C"/>
+                </a:solidFill>
+                <a:latin typeface="DejaVu Sans"/>
+              </a:rPr>
+              <a:t>predictor</a:t>
+            </a:r>
+          </a:p>
+        </p:txBody>
+      </p:sp>
+      <p:sp>
+        <p:nvSpPr>
+          <p:cNvPr id="14" name="TextBox 13"/>
+          <p:cNvSpPr txBox="1"/>
+          <p:nvPr/>
+        </p:nvSpPr>
+        <p:spPr>
+          <a:xfrm>
+            <a:off x="2360531" y="2803351"/>
+            <a:ext cx="809305" cy="236785"/>
+          </a:xfrm>
+          <a:prstGeom prst="rect">
+            <a:avLst/>
+          </a:prstGeom>
+          <a:noFill/>
+        </p:spPr>
+        <p:txBody>
+          <a:bodyPr wrap="none" lIns="0" rIns="0" tIns="0" bIns="0" anchor="ctr">
+            <a:spAutoFit/>
+          </a:bodyPr>
+          <a:lstStyle/>
+          <a:p>
+            <a:pPr algn="ctr">
+              <a:spcBef>
+                <a:spcPts val="0"/>
+              </a:spcBef>
+              <a:spcAft>
+                <a:spcPts val="0"/>
+              </a:spcAft>
+            </a:pPr>
+            <a:r>
+              <a:rPr sz="1370" b="0">
+                <a:solidFill>
+                  <a:srgbClr val="59636A"/>
+                </a:solidFill>
+                <a:latin typeface="DejaVu Sans"/>
+              </a:rPr>
+              <a:t>Splatt3R</a:t>
+            </a:r>
+          </a:p>
+        </p:txBody>
+      </p:sp>
+      <p:sp>
+        <p:nvSpPr>
+          <p:cNvPr id="15" name="Freeform 14"/>
           <p:cNvSpPr/>
           <p:nvPr/>
         </p:nvSpPr>
         <p:spPr>
-          <a:xfrm rot="5400000">
-            <a:off x="7729880" y="2193645"/>
-            <a:ext cx="100584" cy="100584"/>
-          </a:xfrm>
-          <a:prstGeom prst="triangle">
+          <a:xfrm>
+            <a:off x="1479051" y="1896094"/>
+            <a:ext cx="520965" cy="374444"/>
+          </a:xfrm>
+          <a:custGeom>
+            <a:avLst/>
+            <a:gdLst/>
+            <a:ahLst/>
+            <a:cxnLst/>
+            <a:rect l="l" t="t" r="r" b="b"/>
+            <a:pathLst>
+              <a:path w="520965" h="374444">
+                <a:moveTo>
+                  <a:pt x="0" y="0"/>
+                </a:moveTo>
+                <a:lnTo>
+                  <a:pt x="276763" y="0"/>
+                </a:lnTo>
+                <a:lnTo>
+                  <a:pt x="276763" y="374444"/>
+                </a:lnTo>
+                <a:lnTo>
+                  <a:pt x="520965" y="374444"/>
+                </a:lnTo>
+              </a:path>
+            </a:pathLst>
+          </a:custGeom>
+          <a:noFill/>
+          <a:ln w="18089">
+            <a:solidFill>
+              <a:srgbClr val="20282C"/>
+            </a:solidFill>
+            <a:tailEnd type="triangle" w="sm" len="sm"/>
+          </a:ln>
+          <a:effectLst/>
+        </p:spPr>
+        <p:txBody>
+          <a:bodyPr rtlCol="0" anchor="ctr"/>
+          <a:lstStyle/>
+          <a:p>
+            <a:pPr algn="ctr"/>
+          </a:p>
+        </p:txBody>
+      </p:sp>
+      <p:sp>
+        <p:nvSpPr>
+          <p:cNvPr id="16" name="Freeform 15"/>
+          <p:cNvSpPr/>
+          <p:nvPr/>
+        </p:nvSpPr>
+        <p:spPr>
+          <a:xfrm>
+            <a:off x="1479051" y="2986865"/>
+            <a:ext cx="520965" cy="0"/>
+          </a:xfrm>
+          <a:custGeom>
+            <a:avLst/>
+            <a:gdLst/>
+            <a:ahLst/>
+            <a:cxnLst/>
+            <a:rect l="l" t="t" r="r" b="b"/>
+            <a:pathLst>
+              <a:path w="520965" h="0">
+                <a:moveTo>
+                  <a:pt x="0" y="0"/>
+                </a:moveTo>
+                <a:lnTo>
+                  <a:pt x="520965" y="0"/>
+                </a:lnTo>
+              </a:path>
+            </a:pathLst>
+          </a:custGeom>
+          <a:noFill/>
+          <a:ln w="18089">
+            <a:solidFill>
+              <a:srgbClr val="20282C"/>
+            </a:solidFill>
+            <a:tailEnd type="triangle" w="sm" len="sm"/>
+          </a:ln>
+          <a:effectLst/>
+        </p:spPr>
+        <p:txBody>
+          <a:bodyPr rtlCol="0" anchor="ctr"/>
+          <a:lstStyle/>
+          <a:p>
+            <a:pPr algn="ctr"/>
+          </a:p>
+        </p:txBody>
+      </p:sp>
+      <p:sp>
+        <p:nvSpPr>
+          <p:cNvPr id="17" name="Rectangle 16"/>
+          <p:cNvSpPr/>
+          <p:nvPr/>
+        </p:nvSpPr>
+        <p:spPr>
+          <a:xfrm>
+            <a:off x="4393199" y="1456530"/>
+            <a:ext cx="2686225" cy="651206"/>
+          </a:xfrm>
+          <a:prstGeom prst="rect">
             <a:avLst/>
           </a:prstGeom>
           <a:solidFill>
-            <a:srgbClr val="C36B31"/>
+            <a:srgbClr val="FFFFFF"/>
           </a:solidFill>
-          <a:ln>
-            <a:noFill/>
-          </a:ln>
-        </p:spPr>
-        <p:style>
-          <a:lnRef idx="1">
-            <a:schemeClr val="accent1"/>
-          </a:lnRef>
-          <a:fillRef idx="3">
-            <a:schemeClr val="accent1"/>
-          </a:fillRef>
-          <a:effectRef idx="2">
-            <a:schemeClr val="accent1"/>
-          </a:effectRef>
-          <a:fontRef idx="minor">
-            <a:schemeClr val="lt1"/>
-          </a:fontRef>
-        </p:style>
+          <a:ln w="15827">
+            <a:solidFill>
+              <a:srgbClr val="20282C"/>
+            </a:solidFill>
+          </a:ln>
+          <a:effectLst/>
+        </p:spPr>
         <p:txBody>
           <a:bodyPr rtlCol="0" anchor="ctr"/>
           <a:lstStyle/>
@@ -47545,41 +47017,282 @@
       </p:sp>
       <p:sp>
         <p:nvSpPr>
-          <p:cNvPr id="33" name="Oval 32"/>
+          <p:cNvPr id="18" name="TextBox 17"/>
+          <p:cNvSpPr txBox="1"/>
+          <p:nvPr/>
+        </p:nvSpPr>
+        <p:spPr>
+          <a:xfrm>
+            <a:off x="4589653" y="1656052"/>
+            <a:ext cx="2293318" cy="252161"/>
+          </a:xfrm>
+          <a:prstGeom prst="rect">
+            <a:avLst/>
+          </a:prstGeom>
+          <a:noFill/>
+        </p:spPr>
+        <p:txBody>
+          <a:bodyPr wrap="none" lIns="0" rIns="0" tIns="0" bIns="0" anchor="ctr">
+            <a:spAutoFit/>
+          </a:bodyPr>
+          <a:lstStyle/>
+          <a:p>
+            <a:pPr algn="ctr">
+              <a:spcBef>
+                <a:spcPts val="0"/>
+              </a:spcBef>
+              <a:spcAft>
+                <a:spcPts val="0"/>
+              </a:spcAft>
+            </a:pPr>
+            <a:r>
+              <a:rPr sz="1459" b="1">
+                <a:solidFill>
+                  <a:srgbClr val="20282C"/>
+                </a:solidFill>
+                <a:latin typeface="DejaVu Sans"/>
+              </a:rPr>
+              <a:t>Tracker + pose graph</a:t>
+            </a:r>
+          </a:p>
+        </p:txBody>
+      </p:sp>
+      <p:sp>
+        <p:nvSpPr>
+          <p:cNvPr id="19" name="Freeform 18"/>
           <p:cNvSpPr/>
           <p:nvPr/>
         </p:nvSpPr>
         <p:spPr>
-          <a:xfrm rot="900000">
-            <a:off x="7936992" y="2197303"/>
-            <a:ext cx="264261" cy="116586"/>
+          <a:xfrm>
+            <a:off x="3530351" y="1782133"/>
+            <a:ext cx="862848" cy="488405"/>
+          </a:xfrm>
+          <a:custGeom>
+            <a:avLst/>
+            <a:gdLst/>
+            <a:ahLst/>
+            <a:cxnLst/>
+            <a:rect l="l" t="t" r="r" b="b"/>
+            <a:pathLst>
+              <a:path w="862848" h="488405">
+                <a:moveTo>
+                  <a:pt x="0" y="488405"/>
+                </a:moveTo>
+                <a:lnTo>
+                  <a:pt x="374443" y="488405"/>
+                </a:lnTo>
+                <a:lnTo>
+                  <a:pt x="374443" y="0"/>
+                </a:lnTo>
+                <a:lnTo>
+                  <a:pt x="862848" y="0"/>
+                </a:lnTo>
+              </a:path>
+            </a:pathLst>
+          </a:custGeom>
+          <a:noFill/>
+          <a:ln w="18089">
+            <a:solidFill>
+              <a:srgbClr val="376687"/>
+            </a:solidFill>
+            <a:tailEnd type="triangle" w="sm" len="sm"/>
+          </a:ln>
+          <a:effectLst/>
+        </p:spPr>
+        <p:txBody>
+          <a:bodyPr rtlCol="0" anchor="ctr"/>
+          <a:lstStyle/>
+          <a:p>
+            <a:pPr algn="ctr"/>
+          </a:p>
+        </p:txBody>
+      </p:sp>
+      <p:sp>
+        <p:nvSpPr>
+          <p:cNvPr id="20" name="TextBox 19"/>
+          <p:cNvSpPr txBox="1"/>
+          <p:nvPr/>
+        </p:nvSpPr>
+        <p:spPr>
+          <a:xfrm>
+            <a:off x="2862485" y="1422613"/>
+            <a:ext cx="912446" cy="230635"/>
+          </a:xfrm>
+          <a:prstGeom prst="rect">
+            <a:avLst/>
+          </a:prstGeom>
+          <a:noFill/>
+        </p:spPr>
+        <p:txBody>
+          <a:bodyPr wrap="none" lIns="0" rIns="0" tIns="0" bIns="0" anchor="ctr">
+            <a:spAutoFit/>
+          </a:bodyPr>
+          <a:lstStyle/>
+          <a:p>
+            <a:pPr algn="ctr">
+              <a:spcBef>
+                <a:spcPts val="0"/>
+              </a:spcBef>
+              <a:spcAft>
+                <a:spcPts val="0"/>
+              </a:spcAft>
+            </a:pPr>
+            <a:r>
+              <a:rPr sz="1335" b="0">
+                <a:solidFill>
+                  <a:srgbClr val="376687"/>
+                </a:solidFill>
+                <a:latin typeface="DejaVu Sans"/>
+              </a:rPr>
+              <a:t>Geometry</a:t>
+            </a:r>
+          </a:p>
+        </p:txBody>
+      </p:sp>
+      <p:sp>
+        <p:nvSpPr>
+          <p:cNvPr id="21" name="Rectangle 20"/>
+          <p:cNvSpPr/>
+          <p:nvPr/>
+        </p:nvSpPr>
+        <p:spPr>
+          <a:xfrm>
+            <a:off x="4393199" y="2710102"/>
+            <a:ext cx="2686225" cy="1514054"/>
+          </a:xfrm>
+          <a:prstGeom prst="rect">
+            <a:avLst/>
+          </a:prstGeom>
+          <a:solidFill>
+            <a:srgbClr val="FFFFFF"/>
+          </a:solidFill>
+          <a:ln w="15827">
+            <a:solidFill>
+              <a:srgbClr val="C5CBCF"/>
+            </a:solidFill>
+          </a:ln>
+          <a:effectLst/>
+        </p:spPr>
+        <p:txBody>
+          <a:bodyPr rtlCol="0" anchor="ctr"/>
+          <a:lstStyle/>
+          <a:p>
+            <a:pPr algn="ctr"/>
+          </a:p>
+        </p:txBody>
+      </p:sp>
+      <p:sp>
+        <p:nvSpPr>
+          <p:cNvPr id="22" name="TextBox 21"/>
+          <p:cNvSpPr txBox="1"/>
+          <p:nvPr/>
+        </p:nvSpPr>
+        <p:spPr>
+          <a:xfrm>
+            <a:off x="4523440" y="2326614"/>
+            <a:ext cx="1569904" cy="246011"/>
+          </a:xfrm>
+          <a:prstGeom prst="rect">
+            <a:avLst/>
+          </a:prstGeom>
+          <a:noFill/>
+        </p:spPr>
+        <p:txBody>
+          <a:bodyPr wrap="none" lIns="0" rIns="0" tIns="0" bIns="0" anchor="ctr">
+            <a:spAutoFit/>
+          </a:bodyPr>
+          <a:lstStyle/>
+          <a:p>
+            <a:pPr algn="l">
+              <a:spcBef>
+                <a:spcPts val="0"/>
+              </a:spcBef>
+              <a:spcAft>
+                <a:spcPts val="0"/>
+              </a:spcAft>
+            </a:pPr>
+            <a:r>
+              <a:rPr sz="1424" b="0">
+                <a:solidFill>
+                  <a:srgbClr val="20282C"/>
+                </a:solidFill>
+                <a:latin typeface="DejaVu Sans"/>
+              </a:rPr>
+              <a:t>Anchor k: T_WCₖ</a:t>
+            </a:r>
+          </a:p>
+        </p:txBody>
+      </p:sp>
+      <p:sp>
+        <p:nvSpPr>
+          <p:cNvPr id="23" name="Freeform 22"/>
+          <p:cNvSpPr/>
+          <p:nvPr/>
+        </p:nvSpPr>
+        <p:spPr>
+          <a:xfrm>
+            <a:off x="6786382" y="2107736"/>
+            <a:ext cx="0" cy="602366"/>
+          </a:xfrm>
+          <a:custGeom>
+            <a:avLst/>
+            <a:gdLst/>
+            <a:ahLst/>
+            <a:cxnLst/>
+            <a:rect l="l" t="t" r="r" b="b"/>
+            <a:pathLst>
+              <a:path w="0" h="602366">
+                <a:moveTo>
+                  <a:pt x="0" y="0"/>
+                </a:moveTo>
+                <a:lnTo>
+                  <a:pt x="0" y="602366"/>
+                </a:lnTo>
+              </a:path>
+            </a:pathLst>
+          </a:custGeom>
+          <a:noFill/>
+          <a:ln w="18089">
+            <a:solidFill>
+              <a:srgbClr val="376687"/>
+            </a:solidFill>
+            <a:tailEnd type="triangle" w="sm" len="sm"/>
+          </a:ln>
+          <a:effectLst/>
+        </p:spPr>
+        <p:txBody>
+          <a:bodyPr rtlCol="0" anchor="ctr"/>
+          <a:lstStyle/>
+          <a:p>
+            <a:pPr algn="ctr"/>
+          </a:p>
+        </p:txBody>
+      </p:sp>
+      <p:sp>
+        <p:nvSpPr>
+          <p:cNvPr id="24" name="Oval 23"/>
+          <p:cNvSpPr/>
+          <p:nvPr/>
+        </p:nvSpPr>
+        <p:spPr>
+          <a:xfrm rot="20100000">
+            <a:off x="4557303" y="3026588"/>
+            <a:ext cx="270901" cy="109402"/>
           </a:xfrm>
           <a:prstGeom prst="ellipse">
             <a:avLst/>
           </a:prstGeom>
           <a:solidFill>
-            <a:srgbClr val="3478A5"/>
+            <a:srgbClr val="FFFFFF"/>
           </a:solidFill>
-          <a:ln w="10160">
-            <a:solidFill>
-              <a:srgbClr val="3478A5"/>
-            </a:solidFill>
-          </a:ln>
-        </p:spPr>
-        <p:style>
-          <a:lnRef idx="1">
-            <a:schemeClr val="accent1"/>
-          </a:lnRef>
-          <a:fillRef idx="3">
-            <a:schemeClr val="accent1"/>
-          </a:fillRef>
-          <a:effectRef idx="2">
-            <a:schemeClr val="accent1"/>
-          </a:effectRef>
-          <a:fontRef idx="minor">
-            <a:schemeClr val="lt1"/>
-          </a:fontRef>
-        </p:style>
+          <a:ln w="15827">
+            <a:solidFill>
+              <a:srgbClr val="167568"/>
+            </a:solidFill>
+          </a:ln>
+          <a:effectLst/>
+        </p:spPr>
         <p:txBody>
           <a:bodyPr rtlCol="0" anchor="ctr"/>
           <a:lstStyle/>
@@ -47590,41 +47303,28 @@
       </p:sp>
       <p:sp>
         <p:nvSpPr>
-          <p:cNvPr id="34" name="Oval 33"/>
+          <p:cNvPr id="25" name="Oval 24"/>
           <p:cNvSpPr/>
           <p:nvPr/>
         </p:nvSpPr>
         <p:spPr>
-          <a:xfrm rot="20400000">
-            <a:off x="8154619" y="2072944"/>
-            <a:ext cx="233172" cy="108813"/>
+          <a:xfrm rot="1200000">
+            <a:off x="4744851" y="2943234"/>
+            <a:ext cx="270901" cy="109402"/>
           </a:xfrm>
           <a:prstGeom prst="ellipse">
             <a:avLst/>
           </a:prstGeom>
           <a:solidFill>
-            <a:srgbClr val="168077"/>
+            <a:srgbClr val="FFFFFF"/>
           </a:solidFill>
-          <a:ln w="10160">
-            <a:solidFill>
-              <a:srgbClr val="168077"/>
-            </a:solidFill>
-          </a:ln>
-        </p:spPr>
-        <p:style>
-          <a:lnRef idx="1">
-            <a:schemeClr val="accent1"/>
-          </a:lnRef>
-          <a:fillRef idx="3">
-            <a:schemeClr val="accent1"/>
-          </a:fillRef>
-          <a:effectRef idx="2">
-            <a:schemeClr val="accent1"/>
-          </a:effectRef>
-          <a:fontRef idx="minor">
-            <a:schemeClr val="lt1"/>
-          </a:fontRef>
-        </p:style>
+          <a:ln w="15827">
+            <a:solidFill>
+              <a:srgbClr val="167568"/>
+            </a:solidFill>
+          </a:ln>
+          <a:effectLst/>
+        </p:spPr>
         <p:txBody>
           <a:bodyPr rtlCol="0" anchor="ctr"/>
           <a:lstStyle/>
@@ -47635,41 +47335,28 @@
       </p:sp>
       <p:sp>
         <p:nvSpPr>
-          <p:cNvPr id="35" name="Oval 34"/>
+          <p:cNvPr id="26" name="Oval 25"/>
           <p:cNvSpPr/>
           <p:nvPr/>
         </p:nvSpPr>
         <p:spPr>
-          <a:xfrm rot="600000">
-            <a:off x="8232343" y="2290572"/>
-            <a:ext cx="279806" cy="124358"/>
+          <a:xfrm rot="20700000">
+            <a:off x="4911559" y="3068266"/>
+            <a:ext cx="270901" cy="109402"/>
           </a:xfrm>
           <a:prstGeom prst="ellipse">
             <a:avLst/>
           </a:prstGeom>
           <a:solidFill>
-            <a:srgbClr val="C36B31"/>
+            <a:srgbClr val="FFFFFF"/>
           </a:solidFill>
-          <a:ln w="10160">
-            <a:solidFill>
-              <a:srgbClr val="C36B31"/>
-            </a:solidFill>
-          </a:ln>
-        </p:spPr>
-        <p:style>
-          <a:lnRef idx="1">
-            <a:schemeClr val="accent1"/>
-          </a:lnRef>
-          <a:fillRef idx="3">
-            <a:schemeClr val="accent1"/>
-          </a:fillRef>
-          <a:effectRef idx="2">
-            <a:schemeClr val="accent1"/>
-          </a:effectRef>
-          <a:fontRef idx="minor">
-            <a:schemeClr val="lt1"/>
-          </a:fontRef>
-        </p:style>
+          <a:ln w="15827">
+            <a:solidFill>
+              <a:srgbClr val="167568"/>
+            </a:solidFill>
+          </a:ln>
+          <a:effectLst/>
+        </p:spPr>
         <p:txBody>
           <a:bodyPr rtlCol="0" anchor="ctr"/>
           <a:lstStyle/>
@@ -47680,41 +47367,28 @@
       </p:sp>
       <p:sp>
         <p:nvSpPr>
-          <p:cNvPr id="36" name="Oval 35"/>
+          <p:cNvPr id="27" name="Oval 26"/>
           <p:cNvSpPr/>
           <p:nvPr/>
         </p:nvSpPr>
         <p:spPr>
-          <a:xfrm rot="20880000">
-            <a:off x="8465515" y="2150668"/>
-            <a:ext cx="209854" cy="101041"/>
+          <a:xfrm rot="1080000">
+            <a:off x="4671915" y="3162039"/>
+            <a:ext cx="270901" cy="109402"/>
           </a:xfrm>
           <a:prstGeom prst="ellipse">
             <a:avLst/>
           </a:prstGeom>
           <a:solidFill>
-            <a:srgbClr val="A14D78"/>
+            <a:srgbClr val="FFFFFF"/>
           </a:solidFill>
-          <a:ln w="10160">
-            <a:solidFill>
-              <a:srgbClr val="A14D78"/>
-            </a:solidFill>
-          </a:ln>
-        </p:spPr>
-        <p:style>
-          <a:lnRef idx="1">
-            <a:schemeClr val="accent1"/>
-          </a:lnRef>
-          <a:fillRef idx="3">
-            <a:schemeClr val="accent1"/>
-          </a:fillRef>
-          <a:effectRef idx="2">
-            <a:schemeClr val="accent1"/>
-          </a:effectRef>
-          <a:fontRef idx="minor">
-            <a:schemeClr val="lt1"/>
-          </a:fontRef>
-        </p:style>
+          <a:ln w="15827">
+            <a:solidFill>
+              <a:srgbClr val="167568"/>
+            </a:solidFill>
+          </a:ln>
+          <a:effectLst/>
+        </p:spPr>
         <p:txBody>
           <a:bodyPr rtlCol="0" anchor="ctr"/>
           <a:lstStyle/>
@@ -47725,109 +47399,440 @@
       </p:sp>
       <p:sp>
         <p:nvSpPr>
-          <p:cNvPr id="37" name="TextBox 36"/>
-          <p:cNvSpPr txBox="1"/>
-          <p:nvPr/>
-        </p:nvSpPr>
-        <p:spPr>
-          <a:xfrm>
-            <a:off x="7242048" y="3044952"/>
-            <a:ext cx="1719072" cy="292608"/>
-          </a:xfrm>
-          <a:prstGeom prst="rect">
-            <a:avLst/>
-          </a:prstGeom>
-          <a:noFill/>
-        </p:spPr>
-        <p:txBody>
-          <a:bodyPr wrap="none" lIns="27432" rIns="27432" tIns="9144" bIns="9144" anchor="ctr">
-            <a:spAutoFit/>
-          </a:bodyPr>
-          <a:lstStyle/>
-          <a:p>
-            <a:pPr algn="ctr"/>
-            <a:r>
-              <a:rPr sz="850" b="1">
-                <a:solidFill>
-                  <a:srgbClr val="C36B31"/>
-                </a:solidFill>
-                <a:latin typeface="Arial"/>
-              </a:rPr>
-              <a:t>Ch. 4 / Eqs. (4.1-4.3)</a:t>
-            </a:r>
-          </a:p>
-        </p:txBody>
-      </p:sp>
-      <p:cxnSp>
-        <p:nvCxnSpPr>
-          <p:cNvPr id="38" name="Connector 37"/>
-          <p:cNvCxnSpPr/>
-          <p:nvPr/>
-        </p:nvCxnSpPr>
-        <p:spPr>
-          <a:xfrm>
-            <a:off x="6812280" y="2441448"/>
-            <a:ext cx="320040" cy="0"/>
-          </a:xfrm>
-          <a:prstGeom prst="line">
-            <a:avLst/>
-          </a:prstGeom>
-          <a:ln w="20320">
-            <a:solidFill>
-              <a:srgbClr val="168077"/>
-            </a:solidFill>
-          </a:ln>
-        </p:spPr>
-        <p:style>
-          <a:lnRef idx="2">
-            <a:schemeClr val="accent1"/>
-          </a:lnRef>
-          <a:fillRef idx="0">
-            <a:schemeClr val="accent1"/>
-          </a:fillRef>
-          <a:effectRef idx="1">
-            <a:schemeClr val="accent1"/>
-          </a:effectRef>
-          <a:fontRef idx="minor">
-            <a:schemeClr val="tx1"/>
-          </a:fontRef>
-        </p:style>
-      </p:cxnSp>
-      <p:sp>
-        <p:nvSpPr>
-          <p:cNvPr id="39" name="Isosceles Triangle 38"/>
+          <p:cNvPr id="28" name="TextBox 27"/>
+          <p:cNvSpPr txBox="1"/>
+          <p:nvPr/>
+        </p:nvSpPr>
+        <p:spPr>
+          <a:xfrm>
+            <a:off x="5418849" y="3010381"/>
+            <a:ext cx="1255183" cy="246011"/>
+          </a:xfrm>
+          <a:prstGeom prst="rect">
+            <a:avLst/>
+          </a:prstGeom>
+          <a:noFill/>
+        </p:spPr>
+        <p:txBody>
+          <a:bodyPr wrap="none" lIns="0" rIns="0" tIns="0" bIns="0" anchor="ctr">
+            <a:spAutoFit/>
+          </a:bodyPr>
+          <a:lstStyle/>
+          <a:p>
+            <a:pPr algn="l">
+              <a:spcBef>
+                <a:spcPts val="0"/>
+              </a:spcBef>
+              <a:spcAft>
+                <a:spcPts val="0"/>
+              </a:spcAft>
+            </a:pPr>
+            <a:r>
+              <a:rPr sz="1424" b="0">
+                <a:solidFill>
+                  <a:srgbClr val="20282C"/>
+                </a:solidFill>
+                <a:latin typeface="DejaVu Sans"/>
+              </a:rPr>
+              <a:t>Local map Gₖ</a:t>
+            </a:r>
+          </a:p>
+        </p:txBody>
+      </p:sp>
+      <p:sp>
+        <p:nvSpPr>
+          <p:cNvPr id="29" name="Freeform 28"/>
           <p:cNvSpPr/>
           <p:nvPr/>
         </p:nvSpPr>
         <p:spPr>
-          <a:xfrm rot="5400000">
-            <a:off x="7082028" y="2391156"/>
-            <a:ext cx="100584" cy="100584"/>
-          </a:xfrm>
-          <a:prstGeom prst="triangle">
+          <a:xfrm>
+            <a:off x="4572281" y="3708401"/>
+            <a:ext cx="262436" cy="282624"/>
+          </a:xfrm>
+          <a:custGeom>
+            <a:avLst/>
+            <a:gdLst/>
+            <a:ahLst/>
+            <a:cxnLst/>
+            <a:rect l="l" t="t" r="r" b="b"/>
+            <a:pathLst>
+              <a:path w="262436" h="282624">
+                <a:moveTo>
+                  <a:pt x="0" y="141312"/>
+                </a:moveTo>
+                <a:lnTo>
+                  <a:pt x="262436" y="0"/>
+                </a:lnTo>
+                <a:lnTo>
+                  <a:pt x="262436" y="282624"/>
+                </a:lnTo>
+                <a:lnTo>
+                  <a:pt x="0" y="141312"/>
+                </a:lnTo>
+              </a:path>
+            </a:pathLst>
+          </a:custGeom>
+          <a:noFill/>
+          <a:ln w="18089">
+            <a:solidFill>
+              <a:srgbClr val="376687"/>
+            </a:solidFill>
+          </a:ln>
+          <a:effectLst/>
+        </p:spPr>
+        <p:txBody>
+          <a:bodyPr rtlCol="0" anchor="ctr"/>
+          <a:lstStyle/>
+          <a:p>
+            <a:pPr algn="ctr"/>
+          </a:p>
+        </p:txBody>
+      </p:sp>
+      <p:sp>
+        <p:nvSpPr>
+          <p:cNvPr id="30" name="Freeform 29"/>
+          <p:cNvSpPr/>
+          <p:nvPr/>
+        </p:nvSpPr>
+        <p:spPr>
+          <a:xfrm>
+            <a:off x="4834717" y="3647839"/>
+            <a:ext cx="141312" cy="403748"/>
+          </a:xfrm>
+          <a:custGeom>
+            <a:avLst/>
+            <a:gdLst/>
+            <a:ahLst/>
+            <a:cxnLst/>
+            <a:rect l="l" t="t" r="r" b="b"/>
+            <a:pathLst>
+              <a:path w="141312" h="403748">
+                <a:moveTo>
+                  <a:pt x="0" y="60562"/>
+                </a:moveTo>
+                <a:lnTo>
+                  <a:pt x="141312" y="0"/>
+                </a:lnTo>
+                <a:lnTo>
+                  <a:pt x="141312" y="403748"/>
+                </a:lnTo>
+                <a:lnTo>
+                  <a:pt x="0" y="343186"/>
+                </a:lnTo>
+              </a:path>
+            </a:pathLst>
+          </a:custGeom>
+          <a:noFill/>
+          <a:ln w="13566">
+            <a:solidFill>
+              <a:srgbClr val="376687"/>
+            </a:solidFill>
+          </a:ln>
+          <a:effectLst/>
+        </p:spPr>
+        <p:txBody>
+          <a:bodyPr rtlCol="0" anchor="ctr"/>
+          <a:lstStyle/>
+          <a:p>
+            <a:pPr algn="ctr"/>
+          </a:p>
+        </p:txBody>
+      </p:sp>
+      <p:sp>
+        <p:nvSpPr>
+          <p:cNvPr id="31" name="TextBox 30"/>
+          <p:cNvSpPr txBox="1"/>
+          <p:nvPr/>
+        </p:nvSpPr>
+        <p:spPr>
+          <a:xfrm>
+            <a:off x="5418849" y="3599541"/>
+            <a:ext cx="1360071" cy="239860"/>
+          </a:xfrm>
+          <a:prstGeom prst="rect">
+            <a:avLst/>
+          </a:prstGeom>
+          <a:noFill/>
+        </p:spPr>
+        <p:txBody>
+          <a:bodyPr wrap="none" lIns="0" rIns="0" tIns="0" bIns="0" anchor="ctr">
+            <a:spAutoFit/>
+          </a:bodyPr>
+          <a:lstStyle/>
+          <a:p>
+            <a:pPr algn="l">
+              <a:spcBef>
+                <a:spcPts val="0"/>
+              </a:spcBef>
+              <a:spcAft>
+                <a:spcPts val="0"/>
+              </a:spcAft>
+            </a:pPr>
+            <a:r>
+              <a:rPr sz="1388" b="0">
+                <a:solidFill>
+                  <a:srgbClr val="20282C"/>
+                </a:solidFill>
+                <a:latin typeface="DejaVu Sans"/>
+              </a:rPr>
+              <a:t>RGB + relative</a:t>
+            </a:r>
+          </a:p>
+        </p:txBody>
+      </p:sp>
+      <p:sp>
+        <p:nvSpPr>
+          <p:cNvPr id="32" name="TextBox 31"/>
+          <p:cNvSpPr txBox="1"/>
+          <p:nvPr/>
+        </p:nvSpPr>
+        <p:spPr>
+          <a:xfrm>
+            <a:off x="5418849" y="3892584"/>
+            <a:ext cx="1204564" cy="239860"/>
+          </a:xfrm>
+          <a:prstGeom prst="rect">
+            <a:avLst/>
+          </a:prstGeom>
+          <a:noFill/>
+        </p:spPr>
+        <p:txBody>
+          <a:bodyPr wrap="none" lIns="0" rIns="0" tIns="0" bIns="0" anchor="ctr">
+            <a:spAutoFit/>
+          </a:bodyPr>
+          <a:lstStyle/>
+          <a:p>
+            <a:pPr algn="l">
+              <a:spcBef>
+                <a:spcPts val="0"/>
+              </a:spcBef>
+              <a:spcAft>
+                <a:spcPts val="0"/>
+              </a:spcAft>
+            </a:pPr>
+            <a:r>
+              <a:rPr sz="1388" b="0">
+                <a:solidFill>
+                  <a:srgbClr val="20282C"/>
+                </a:solidFill>
+                <a:latin typeface="DejaVu Sans"/>
+              </a:rPr>
+              <a:t>camera pose</a:t>
+            </a:r>
+          </a:p>
+        </p:txBody>
+      </p:sp>
+      <p:sp>
+        <p:nvSpPr>
+          <p:cNvPr id="33" name="Freeform 32"/>
+          <p:cNvSpPr/>
+          <p:nvPr/>
+        </p:nvSpPr>
+        <p:spPr>
+          <a:xfrm>
+            <a:off x="3530351" y="2775223"/>
+            <a:ext cx="862848" cy="358163"/>
+          </a:xfrm>
+          <a:custGeom>
+            <a:avLst/>
+            <a:gdLst/>
+            <a:ahLst/>
+            <a:cxnLst/>
+            <a:rect l="l" t="t" r="r" b="b"/>
+            <a:pathLst>
+              <a:path w="862848" h="358163">
+                <a:moveTo>
+                  <a:pt x="0" y="0"/>
+                </a:moveTo>
+                <a:lnTo>
+                  <a:pt x="325603" y="0"/>
+                </a:lnTo>
+                <a:lnTo>
+                  <a:pt x="325603" y="358163"/>
+                </a:lnTo>
+                <a:lnTo>
+                  <a:pt x="862848" y="358163"/>
+                </a:lnTo>
+              </a:path>
+            </a:pathLst>
+          </a:custGeom>
+          <a:noFill/>
+          <a:ln w="18089">
+            <a:solidFill>
+              <a:srgbClr val="167568"/>
+            </a:solidFill>
+            <a:tailEnd type="triangle" w="sm" len="sm"/>
+          </a:ln>
+          <a:effectLst/>
+        </p:spPr>
+        <p:txBody>
+          <a:bodyPr rtlCol="0" anchor="ctr"/>
+          <a:lstStyle/>
+          <a:p>
+            <a:pPr algn="ctr"/>
+          </a:p>
+        </p:txBody>
+      </p:sp>
+      <p:sp>
+        <p:nvSpPr>
+          <p:cNvPr id="34" name="TextBox 33"/>
+          <p:cNvSpPr txBox="1"/>
+          <p:nvPr/>
+        </p:nvSpPr>
+        <p:spPr>
+          <a:xfrm>
+            <a:off x="2457347" y="3260733"/>
+            <a:ext cx="941275" cy="233710"/>
+          </a:xfrm>
+          <a:prstGeom prst="rect">
+            <a:avLst/>
+          </a:prstGeom>
+          <a:noFill/>
+        </p:spPr>
+        <p:txBody>
+          <a:bodyPr wrap="none" lIns="0" rIns="0" tIns="0" bIns="0" anchor="ctr">
+            <a:spAutoFit/>
+          </a:bodyPr>
+          <a:lstStyle/>
+          <a:p>
+            <a:pPr algn="ctr">
+              <a:spcBef>
+                <a:spcPts val="0"/>
+              </a:spcBef>
+              <a:spcAft>
+                <a:spcPts val="0"/>
+              </a:spcAft>
+            </a:pPr>
+            <a:r>
+              <a:rPr sz="1353" b="0">
+                <a:solidFill>
+                  <a:srgbClr val="167568"/>
+                </a:solidFill>
+                <a:latin typeface="DejaVu Sans"/>
+              </a:rPr>
+              <a:t>Gaussians</a:t>
+            </a:r>
+          </a:p>
+        </p:txBody>
+      </p:sp>
+      <p:sp>
+        <p:nvSpPr>
+          <p:cNvPr id="35" name="Freeform 34"/>
+          <p:cNvSpPr/>
+          <p:nvPr/>
+        </p:nvSpPr>
+        <p:spPr>
+          <a:xfrm>
+            <a:off x="1479051" y="3231067"/>
+            <a:ext cx="2914148" cy="667486"/>
+          </a:xfrm>
+          <a:custGeom>
+            <a:avLst/>
+            <a:gdLst/>
+            <a:ahLst/>
+            <a:cxnLst/>
+            <a:rect l="l" t="t" r="r" b="b"/>
+            <a:pathLst>
+              <a:path w="2914148" h="667486">
+                <a:moveTo>
+                  <a:pt x="0" y="0"/>
+                </a:moveTo>
+                <a:lnTo>
+                  <a:pt x="162802" y="0"/>
+                </a:lnTo>
+                <a:lnTo>
+                  <a:pt x="162802" y="667486"/>
+                </a:lnTo>
+                <a:lnTo>
+                  <a:pt x="2914148" y="667486"/>
+                </a:lnTo>
+              </a:path>
+            </a:pathLst>
+          </a:custGeom>
+          <a:noFill/>
+          <a:ln w="18089">
+            <a:solidFill>
+              <a:srgbClr val="20282C"/>
+            </a:solidFill>
+            <a:tailEnd type="triangle" w="sm" len="sm"/>
+          </a:ln>
+          <a:effectLst/>
+        </p:spPr>
+        <p:txBody>
+          <a:bodyPr rtlCol="0" anchor="ctr"/>
+          <a:lstStyle/>
+          <a:p>
+            <a:pPr algn="ctr"/>
+          </a:p>
+        </p:txBody>
+      </p:sp>
+      <p:sp>
+        <p:nvSpPr>
+          <p:cNvPr id="36" name="TextBox 35"/>
+          <p:cNvSpPr txBox="1"/>
+          <p:nvPr/>
+        </p:nvSpPr>
+        <p:spPr>
+          <a:xfrm>
+            <a:off x="2179363" y="3620434"/>
+            <a:ext cx="1139081" cy="230635"/>
+          </a:xfrm>
+          <a:prstGeom prst="rect">
+            <a:avLst/>
+          </a:prstGeom>
+          <a:noFill/>
+        </p:spPr>
+        <p:txBody>
+          <a:bodyPr wrap="none" lIns="0" rIns="0" tIns="0" bIns="0" anchor="ctr">
+            <a:spAutoFit/>
+          </a:bodyPr>
+          <a:lstStyle/>
+          <a:p>
+            <a:pPr algn="ctr">
+              <a:spcBef>
+                <a:spcPts val="0"/>
+              </a:spcBef>
+              <a:spcAft>
+                <a:spcPts val="0"/>
+              </a:spcAft>
+            </a:pPr>
+            <a:r>
+              <a:rPr sz="1335" b="0">
+                <a:solidFill>
+                  <a:srgbClr val="59636A"/>
+                </a:solidFill>
+                <a:latin typeface="DejaVu Sans"/>
+              </a:rPr>
+              <a:t>Tracked RGB</a:t>
+            </a:r>
+          </a:p>
+        </p:txBody>
+      </p:sp>
+      <p:sp>
+        <p:nvSpPr>
+          <p:cNvPr id="37" name="Rectangle 36"/>
+          <p:cNvSpPr/>
+          <p:nvPr/>
+        </p:nvSpPr>
+        <p:spPr>
+          <a:xfrm>
+            <a:off x="8039954" y="2791503"/>
+            <a:ext cx="1448933" cy="683766"/>
+          </a:xfrm>
+          <a:prstGeom prst="rect">
             <a:avLst/>
           </a:prstGeom>
           <a:solidFill>
-            <a:srgbClr val="168077"/>
+            <a:srgbClr val="FFFFFF"/>
           </a:solidFill>
-          <a:ln>
-            <a:noFill/>
-          </a:ln>
-        </p:spPr>
-        <p:style>
-          <a:lnRef idx="1">
-            <a:schemeClr val="accent1"/>
-          </a:lnRef>
-          <a:fillRef idx="3">
-            <a:schemeClr val="accent1"/>
-          </a:fillRef>
-          <a:effectRef idx="2">
-            <a:schemeClr val="accent1"/>
-          </a:effectRef>
-          <a:fontRef idx="minor">
-            <a:schemeClr val="lt1"/>
-          </a:fontRef>
-        </p:style>
+          <a:ln w="15827">
+            <a:solidFill>
+              <a:srgbClr val="20282C"/>
+            </a:solidFill>
+          </a:ln>
+          <a:effectLst/>
+        </p:spPr>
         <p:txBody>
           <a:bodyPr rtlCol="0" anchor="ctr"/>
           <a:lstStyle/>
@@ -47836,76 +47841,117 @@
           </a:p>
         </p:txBody>
       </p:sp>
-      <p:cxnSp>
-        <p:nvCxnSpPr>
-          <p:cNvPr id="40" name="Connector 39"/>
-          <p:cNvCxnSpPr/>
-          <p:nvPr/>
-        </p:nvCxnSpPr>
-        <p:spPr>
-          <a:xfrm>
-            <a:off x="9070848" y="1801368"/>
-            <a:ext cx="301752" cy="0"/>
-          </a:xfrm>
-          <a:prstGeom prst="line">
-            <a:avLst/>
-          </a:prstGeom>
-          <a:ln w="20320">
-            <a:solidFill>
-              <a:srgbClr val="A14D78"/>
-            </a:solidFill>
-          </a:ln>
-        </p:spPr>
-        <p:style>
-          <a:lnRef idx="2">
-            <a:schemeClr val="accent1"/>
-          </a:lnRef>
-          <a:fillRef idx="0">
-            <a:schemeClr val="accent1"/>
-          </a:fillRef>
-          <a:effectRef idx="1">
-            <a:schemeClr val="accent1"/>
-          </a:effectRef>
-          <a:fontRef idx="minor">
-            <a:schemeClr val="tx1"/>
-          </a:fontRef>
-        </p:style>
-      </p:cxnSp>
-      <p:sp>
-        <p:nvSpPr>
-          <p:cNvPr id="41" name="Isosceles Triangle 40"/>
+      <p:sp>
+        <p:nvSpPr>
+          <p:cNvPr id="38" name="TextBox 37"/>
+          <p:cNvSpPr txBox="1"/>
+          <p:nvPr/>
+        </p:nvSpPr>
+        <p:spPr>
+          <a:xfrm>
+            <a:off x="8352815" y="3005768"/>
+            <a:ext cx="823211" cy="255236"/>
+          </a:xfrm>
+          <a:prstGeom prst="rect">
+            <a:avLst/>
+          </a:prstGeom>
+          <a:noFill/>
+        </p:spPr>
+        <p:txBody>
+          <a:bodyPr wrap="none" lIns="0" rIns="0" tIns="0" bIns="0" anchor="ctr">
+            <a:spAutoFit/>
+          </a:bodyPr>
+          <a:lstStyle/>
+          <a:p>
+            <a:pPr algn="ctr">
+              <a:spcBef>
+                <a:spcPts val="0"/>
+              </a:spcBef>
+              <a:spcAft>
+                <a:spcPts val="0"/>
+              </a:spcAft>
+            </a:pPr>
+            <a:r>
+              <a:rPr sz="1477" b="1">
+                <a:solidFill>
+                  <a:srgbClr val="20282C"/>
+                </a:solidFill>
+                <a:latin typeface="DejaVu Sans"/>
+              </a:rPr>
+              <a:t>Render</a:t>
+            </a:r>
+          </a:p>
+        </p:txBody>
+      </p:sp>
+      <p:sp>
+        <p:nvSpPr>
+          <p:cNvPr id="39" name="Freeform 38"/>
           <p:cNvSpPr/>
           <p:nvPr/>
         </p:nvSpPr>
         <p:spPr>
-          <a:xfrm rot="5400000">
-            <a:off x="9322308" y="1751076"/>
-            <a:ext cx="100584" cy="100584"/>
-          </a:xfrm>
-          <a:prstGeom prst="triangle">
+          <a:xfrm>
+            <a:off x="7079425" y="3133386"/>
+            <a:ext cx="960529" cy="0"/>
+          </a:xfrm>
+          <a:custGeom>
+            <a:avLst/>
+            <a:gdLst/>
+            <a:ahLst/>
+            <a:cxnLst/>
+            <a:rect l="l" t="t" r="r" b="b"/>
+            <a:pathLst>
+              <a:path w="960529" h="0">
+                <a:moveTo>
+                  <a:pt x="0" y="0"/>
+                </a:moveTo>
+                <a:lnTo>
+                  <a:pt x="960529" y="0"/>
+                </a:lnTo>
+              </a:path>
+            </a:pathLst>
+          </a:custGeom>
+          <a:noFill/>
+          <a:ln w="18089">
+            <a:solidFill>
+              <a:srgbClr val="167568"/>
+            </a:solidFill>
+            <a:tailEnd type="triangle" w="sm" len="sm"/>
+          </a:ln>
+          <a:effectLst/>
+        </p:spPr>
+        <p:txBody>
+          <a:bodyPr rtlCol="0" anchor="ctr"/>
+          <a:lstStyle/>
+          <a:p>
+            <a:pPr algn="ctr"/>
+          </a:p>
+        </p:txBody>
+      </p:sp>
+      <p:sp>
+        <p:nvSpPr>
+          <p:cNvPr id="40" name="Rectangle 39"/>
+          <p:cNvSpPr/>
+          <p:nvPr/>
+        </p:nvSpPr>
+        <p:spPr>
+          <a:xfrm>
+            <a:off x="8039954" y="3817153"/>
+            <a:ext cx="1709416" cy="651206"/>
+          </a:xfrm>
+          <a:prstGeom prst="rect">
             <a:avLst/>
           </a:prstGeom>
           <a:solidFill>
-            <a:srgbClr val="A14D78"/>
+            <a:srgbClr val="FFFFFF"/>
           </a:solidFill>
-          <a:ln>
-            <a:noFill/>
-          </a:ln>
-        </p:spPr>
-        <p:style>
-          <a:lnRef idx="1">
-            <a:schemeClr val="accent1"/>
-          </a:lnRef>
-          <a:fillRef idx="3">
-            <a:schemeClr val="accent1"/>
-          </a:fillRef>
-          <a:effectRef idx="2">
-            <a:schemeClr val="accent1"/>
-          </a:effectRef>
-          <a:fontRef idx="minor">
-            <a:schemeClr val="lt1"/>
-          </a:fontRef>
-        </p:style>
+          <a:ln w="15827">
+            <a:solidFill>
+              <a:srgbClr val="20282C"/>
+            </a:solidFill>
+          </a:ln>
+          <a:effectLst/>
+        </p:spPr>
         <p:txBody>
           <a:bodyPr rtlCol="0" anchor="ctr"/>
           <a:lstStyle/>
@@ -47916,43 +47962,166 @@
       </p:sp>
       <p:sp>
         <p:nvSpPr>
-          <p:cNvPr id="42" name="Rounded Rectangle 41"/>
+          <p:cNvPr id="41" name="TextBox 40"/>
+          <p:cNvSpPr txBox="1"/>
+          <p:nvPr/>
+        </p:nvSpPr>
+        <p:spPr>
+          <a:xfrm>
+            <a:off x="8287548" y="4019750"/>
+            <a:ext cx="1214228" cy="246011"/>
+          </a:xfrm>
+          <a:prstGeom prst="rect">
+            <a:avLst/>
+          </a:prstGeom>
+          <a:noFill/>
+        </p:spPr>
+        <p:txBody>
+          <a:bodyPr wrap="none" lIns="0" rIns="0" tIns="0" bIns="0" anchor="ctr">
+            <a:spAutoFit/>
+          </a:bodyPr>
+          <a:lstStyle/>
+          <a:p>
+            <a:pPr algn="ctr">
+              <a:spcBef>
+                <a:spcPts val="0"/>
+              </a:spcBef>
+              <a:spcAft>
+                <a:spcPts val="0"/>
+              </a:spcAft>
+            </a:pPr>
+            <a:r>
+              <a:rPr sz="1424" b="0">
+                <a:solidFill>
+                  <a:srgbClr val="20282C"/>
+                </a:solidFill>
+                <a:latin typeface="DejaVu Sans"/>
+              </a:rPr>
+              <a:t>Sample view</a:t>
+            </a:r>
+          </a:p>
+        </p:txBody>
+      </p:sp>
+      <p:sp>
+        <p:nvSpPr>
+          <p:cNvPr id="42" name="Freeform 41"/>
           <p:cNvSpPr/>
           <p:nvPr/>
         </p:nvSpPr>
         <p:spPr>
           <a:xfrm>
-            <a:off x="9400032" y="841248"/>
-            <a:ext cx="2450592" cy="2112264"/>
-          </a:xfrm>
-          <a:prstGeom prst="roundRect">
-            <a:avLst>
-              <a:gd name="adj" fmla="val 8000"/>
-            </a:avLst>
+            <a:off x="7079425" y="3947394"/>
+            <a:ext cx="960529" cy="195362"/>
+          </a:xfrm>
+          <a:custGeom>
+            <a:avLst/>
+            <a:gdLst/>
+            <a:ahLst/>
+            <a:cxnLst/>
+            <a:rect l="l" t="t" r="r" b="b"/>
+            <a:pathLst>
+              <a:path w="960529" h="195362">
+                <a:moveTo>
+                  <a:pt x="0" y="0"/>
+                </a:moveTo>
+                <a:lnTo>
+                  <a:pt x="504685" y="0"/>
+                </a:lnTo>
+                <a:lnTo>
+                  <a:pt x="504685" y="195362"/>
+                </a:lnTo>
+                <a:lnTo>
+                  <a:pt x="960529" y="195362"/>
+                </a:lnTo>
+              </a:path>
+            </a:pathLst>
+          </a:custGeom>
+          <a:noFill/>
+          <a:ln w="18089">
+            <a:solidFill>
+              <a:srgbClr val="376687"/>
+            </a:solidFill>
+            <a:tailEnd type="triangle" w="sm" len="sm"/>
+          </a:ln>
+          <a:effectLst/>
+        </p:spPr>
+        <p:txBody>
+          <a:bodyPr rtlCol="0" anchor="ctr"/>
+          <a:lstStyle/>
+          <a:p>
+            <a:pPr algn="ctr"/>
+          </a:p>
+        </p:txBody>
+      </p:sp>
+      <p:sp>
+        <p:nvSpPr>
+          <p:cNvPr id="43" name="Freeform 42"/>
+          <p:cNvSpPr/>
+          <p:nvPr/>
+        </p:nvSpPr>
+        <p:spPr>
+          <a:xfrm>
+            <a:off x="8756281" y="3475269"/>
+            <a:ext cx="0" cy="341884"/>
+          </a:xfrm>
+          <a:custGeom>
+            <a:avLst/>
+            <a:gdLst/>
+            <a:ahLst/>
+            <a:cxnLst/>
+            <a:rect l="l" t="t" r="r" b="b"/>
+            <a:pathLst>
+              <a:path w="0" h="341884">
+                <a:moveTo>
+                  <a:pt x="0" y="341884"/>
+                </a:moveTo>
+                <a:lnTo>
+                  <a:pt x="0" y="0"/>
+                </a:lnTo>
+              </a:path>
+            </a:pathLst>
+          </a:custGeom>
+          <a:noFill/>
+          <a:ln w="18089">
+            <a:solidFill>
+              <a:srgbClr val="376687"/>
+            </a:solidFill>
+            <a:tailEnd type="triangle" w="sm" len="sm"/>
+          </a:ln>
+          <a:effectLst/>
+        </p:spPr>
+        <p:txBody>
+          <a:bodyPr rtlCol="0" anchor="ctr"/>
+          <a:lstStyle/>
+          <a:p>
+            <a:pPr algn="ctr"/>
+          </a:p>
+        </p:txBody>
+      </p:sp>
+      <p:sp>
+        <p:nvSpPr>
+          <p:cNvPr id="44" name="Rectangle 43"/>
+          <p:cNvSpPr/>
+          <p:nvPr/>
+        </p:nvSpPr>
+        <p:spPr>
+          <a:xfrm>
+            <a:off x="10335456" y="2791503"/>
+            <a:ext cx="1448933" cy="683766"/>
+          </a:xfrm>
+          <a:prstGeom prst="rect">
+            <a:avLst/>
           </a:prstGeom>
           <a:solidFill>
-            <a:srgbClr val="F8EDF3"/>
+            <a:srgbClr val="FFFFFF"/>
           </a:solidFill>
-          <a:ln w="12700">
-            <a:solidFill>
-              <a:srgbClr val="A14D78"/>
-            </a:solidFill>
-          </a:ln>
-        </p:spPr>
-        <p:style>
-          <a:lnRef idx="1">
-            <a:schemeClr val="accent1"/>
-          </a:lnRef>
-          <a:fillRef idx="3">
-            <a:schemeClr val="accent1"/>
-          </a:fillRef>
-          <a:effectRef idx="2">
-            <a:schemeClr val="accent1"/>
-          </a:effectRef>
-          <a:fontRef idx="minor">
-            <a:schemeClr val="lt1"/>
-          </a:fontRef>
-        </p:style>
+          <a:ln w="15827">
+            <a:solidFill>
+              <a:srgbClr val="20282C"/>
+            </a:solidFill>
+          </a:ln>
+          <a:effectLst/>
+        </p:spPr>
         <p:txBody>
           <a:bodyPr rtlCol="0" anchor="ctr"/>
           <a:lstStyle/>
@@ -47963,108 +48132,42 @@
       </p:sp>
       <p:sp>
         <p:nvSpPr>
-          <p:cNvPr id="43" name="TextBox 42"/>
-          <p:cNvSpPr txBox="1"/>
-          <p:nvPr/>
-        </p:nvSpPr>
-        <p:spPr>
-          <a:xfrm>
-            <a:off x="9509759" y="914400"/>
-            <a:ext cx="2231136" cy="256032"/>
-          </a:xfrm>
-          <a:prstGeom prst="rect">
-            <a:avLst/>
-          </a:prstGeom>
-          <a:noFill/>
-        </p:spPr>
-        <p:txBody>
-          <a:bodyPr wrap="none" lIns="27432" rIns="27432" tIns="9144" bIns="9144" anchor="ctr">
-            <a:spAutoFit/>
-          </a:bodyPr>
-          <a:lstStyle/>
-          <a:p>
-            <a:pPr algn="l"/>
-            <a:r>
-              <a:rPr sz="1200" b="1">
-                <a:solidFill>
-                  <a:srgbClr val="18323F"/>
-                </a:solidFill>
-                <a:latin typeface="Arial"/>
-              </a:rPr>
-              <a:t>Photometric refinement</a:t>
-            </a:r>
-          </a:p>
-        </p:txBody>
-      </p:sp>
-      <p:sp>
-        <p:nvSpPr>
-          <p:cNvPr id="44" name="TextBox 43"/>
-          <p:cNvSpPr txBox="1"/>
-          <p:nvPr/>
-        </p:nvSpPr>
-        <p:spPr>
-          <a:xfrm>
-            <a:off x="9509759" y="1197864"/>
-            <a:ext cx="2231136" cy="1700784"/>
-          </a:xfrm>
-          <a:prstGeom prst="rect">
-            <a:avLst/>
-          </a:prstGeom>
-          <a:noFill/>
-        </p:spPr>
-        <p:txBody>
-          <a:bodyPr wrap="none" lIns="27432" rIns="27432" tIns="9144" bIns="9144" anchor="t">
-            <a:spAutoFit/>
-          </a:bodyPr>
-          <a:lstStyle/>
-          <a:p>
-            <a:pPr algn="l"/>
-            <a:r>
-              <a:rPr sz="869" b="0">
-                <a:solidFill>
-                  <a:srgbClr val="607681"/>
-                </a:solidFill>
-                <a:latin typeface="Arial"/>
-              </a:rPr>
-              <a:t>sample tracked RGB
-render current map
-L1 + SSIM loss
-Adam update</a:t>
-            </a:r>
-          </a:p>
-        </p:txBody>
-      </p:sp>
-      <p:sp>
-        <p:nvSpPr>
           <p:cNvPr id="45" name="TextBox 44"/>
           <p:cNvSpPr txBox="1"/>
           <p:nvPr/>
         </p:nvSpPr>
         <p:spPr>
           <a:xfrm>
-            <a:off x="9509760" y="3044952"/>
-            <a:ext cx="2212848" cy="292608"/>
-          </a:xfrm>
-          <a:prstGeom prst="rect">
-            <a:avLst/>
-          </a:prstGeom>
-          <a:noFill/>
-        </p:spPr>
-        <p:txBody>
-          <a:bodyPr wrap="none" lIns="27432" rIns="27432" tIns="9144" bIns="9144" anchor="ctr">
-            <a:spAutoFit/>
-          </a:bodyPr>
-          <a:lstStyle/>
-          <a:p>
-            <a:pPr algn="ctr"/>
-            <a:r>
-              <a:rPr sz="850" b="1">
-                <a:solidFill>
-                  <a:srgbClr val="A14D78"/>
-                </a:solidFill>
-                <a:latin typeface="Arial"/>
-              </a:rPr>
-              <a:t>Ch. 7 / Eq. (7.1)</a:t>
+            <a:off x="10796331" y="3005768"/>
+            <a:ext cx="527185" cy="255236"/>
+          </a:xfrm>
+          <a:prstGeom prst="rect">
+            <a:avLst/>
+          </a:prstGeom>
+          <a:noFill/>
+        </p:spPr>
+        <p:txBody>
+          <a:bodyPr wrap="none" lIns="0" rIns="0" tIns="0" bIns="0" anchor="ctr">
+            <a:spAutoFit/>
+          </a:bodyPr>
+          <a:lstStyle/>
+          <a:p>
+            <a:pPr algn="ctr">
+              <a:spcBef>
+                <a:spcPts val="0"/>
+              </a:spcBef>
+              <a:spcAft>
+                <a:spcPts val="0"/>
+              </a:spcAft>
+            </a:pPr>
+            <a:r>
+              <a:rPr sz="1477" b="1">
+                <a:solidFill>
+                  <a:srgbClr val="20282C"/>
+                </a:solidFill>
+                <a:latin typeface="DejaVu Sans"/>
+              </a:rPr>
+              <a:t>Loss</a:t>
             </a:r>
           </a:p>
         </p:txBody>
@@ -48077,36 +48180,518 @@
         </p:nvSpPr>
         <p:spPr>
           <a:xfrm>
-            <a:off x="320040" y="3346704"/>
-            <a:ext cx="2560320" cy="246888"/>
-          </a:xfrm>
-          <a:prstGeom prst="rect">
-            <a:avLst/>
-          </a:prstGeom>
-          <a:noFill/>
-        </p:spPr>
-        <p:txBody>
-          <a:bodyPr wrap="none" lIns="27432" rIns="27432" tIns="9144" bIns="9144" anchor="ctr">
-            <a:spAutoFit/>
-          </a:bodyPr>
-          <a:lstStyle/>
-          <a:p>
-            <a:pPr algn="l"/>
-            <a:r>
-              <a:rPr sz="1100" b="1">
-                <a:solidFill>
-                  <a:srgbClr val="168077"/>
-                </a:solidFill>
-                <a:latin typeface="Arial"/>
-              </a:rPr>
-              <a:t>2  REAL DATA FLOW</a:t>
-            </a:r>
+            <a:off x="10177625" y="3552238"/>
+            <a:ext cx="934308" cy="236785"/>
+          </a:xfrm>
+          <a:prstGeom prst="rect">
+            <a:avLst/>
+          </a:prstGeom>
+          <a:noFill/>
+        </p:spPr>
+        <p:txBody>
+          <a:bodyPr wrap="none" lIns="0" rIns="0" tIns="0" bIns="0" anchor="ctr">
+            <a:spAutoFit/>
+          </a:bodyPr>
+          <a:lstStyle/>
+          <a:p>
+            <a:pPr algn="ctr">
+              <a:spcBef>
+                <a:spcPts val="0"/>
+              </a:spcBef>
+              <a:spcAft>
+                <a:spcPts val="0"/>
+              </a:spcAft>
+            </a:pPr>
+            <a:r>
+              <a:rPr sz="1370" b="0">
+                <a:solidFill>
+                  <a:srgbClr val="59636A"/>
+                </a:solidFill>
+                <a:latin typeface="DejaVu Sans"/>
+              </a:rPr>
+              <a:t>L1 + SSIM</a:t>
+            </a:r>
+          </a:p>
+        </p:txBody>
+      </p:sp>
+      <p:sp>
+        <p:nvSpPr>
+          <p:cNvPr id="47" name="Freeform 46"/>
+          <p:cNvSpPr/>
+          <p:nvPr/>
+        </p:nvSpPr>
+        <p:spPr>
+          <a:xfrm>
+            <a:off x="9488888" y="3133386"/>
+            <a:ext cx="846568" cy="0"/>
+          </a:xfrm>
+          <a:custGeom>
+            <a:avLst/>
+            <a:gdLst/>
+            <a:ahLst/>
+            <a:cxnLst/>
+            <a:rect l="l" t="t" r="r" b="b"/>
+            <a:pathLst>
+              <a:path w="846568" h="0">
+                <a:moveTo>
+                  <a:pt x="0" y="0"/>
+                </a:moveTo>
+                <a:lnTo>
+                  <a:pt x="846568" y="0"/>
+                </a:lnTo>
+              </a:path>
+            </a:pathLst>
+          </a:custGeom>
+          <a:noFill/>
+          <a:ln w="18089">
+            <a:solidFill>
+              <a:srgbClr val="20282C"/>
+            </a:solidFill>
+            <a:tailEnd type="triangle" w="sm" len="sm"/>
+          </a:ln>
+          <a:effectLst/>
+        </p:spPr>
+        <p:txBody>
+          <a:bodyPr rtlCol="0" anchor="ctr"/>
+          <a:lstStyle/>
+          <a:p>
+            <a:pPr algn="ctr"/>
+          </a:p>
+        </p:txBody>
+      </p:sp>
+      <p:sp>
+        <p:nvSpPr>
+          <p:cNvPr id="48" name="TextBox 47"/>
+          <p:cNvSpPr txBox="1"/>
+          <p:nvPr/>
+        </p:nvSpPr>
+        <p:spPr>
+          <a:xfrm>
+            <a:off x="9684250" y="2782458"/>
+            <a:ext cx="455844" cy="246011"/>
+          </a:xfrm>
+          <a:prstGeom prst="rect">
+            <a:avLst/>
+          </a:prstGeom>
+          <a:noFill/>
+        </p:spPr>
+        <p:txBody>
+          <a:bodyPr wrap="none" lIns="0" rIns="0" tIns="0" bIns="0" anchor="ctr">
+            <a:spAutoFit/>
+          </a:bodyPr>
+          <a:lstStyle/>
+          <a:p>
+            <a:pPr algn="ctr">
+              <a:spcBef>
+                <a:spcPts val="0"/>
+              </a:spcBef>
+              <a:spcAft>
+                <a:spcPts val="0"/>
+              </a:spcAft>
+            </a:pPr>
+            <a:r>
+              <a:rPr sz="1424" b="0">
+                <a:solidFill>
+                  <a:srgbClr val="20282C"/>
+                </a:solidFill>
+                <a:latin typeface="DejaVu Sans"/>
+              </a:rPr>
+              <a:t>Î</a:t>
+            </a:r>
+          </a:p>
+        </p:txBody>
+      </p:sp>
+      <p:sp>
+        <p:nvSpPr>
+          <p:cNvPr id="49" name="Freeform 48"/>
+          <p:cNvSpPr/>
+          <p:nvPr/>
+        </p:nvSpPr>
+        <p:spPr>
+          <a:xfrm>
+            <a:off x="9749371" y="3475269"/>
+            <a:ext cx="1921058" cy="667487"/>
+          </a:xfrm>
+          <a:custGeom>
+            <a:avLst/>
+            <a:gdLst/>
+            <a:ahLst/>
+            <a:cxnLst/>
+            <a:rect l="l" t="t" r="r" b="b"/>
+            <a:pathLst>
+              <a:path w="1921058" h="667487">
+                <a:moveTo>
+                  <a:pt x="0" y="667487"/>
+                </a:moveTo>
+                <a:lnTo>
+                  <a:pt x="1921058" y="667487"/>
+                </a:lnTo>
+                <a:lnTo>
+                  <a:pt x="1921058" y="0"/>
+                </a:lnTo>
+              </a:path>
+            </a:pathLst>
+          </a:custGeom>
+          <a:noFill/>
+          <a:ln w="18089">
+            <a:solidFill>
+              <a:srgbClr val="20282C"/>
+            </a:solidFill>
+            <a:tailEnd type="triangle" w="sm" len="sm"/>
+          </a:ln>
+          <a:effectLst/>
+        </p:spPr>
+        <p:txBody>
+          <a:bodyPr rtlCol="0" anchor="ctr"/>
+          <a:lstStyle/>
+          <a:p>
+            <a:pPr algn="ctr"/>
+          </a:p>
+        </p:txBody>
+      </p:sp>
+      <p:sp>
+        <p:nvSpPr>
+          <p:cNvPr id="50" name="TextBox 49"/>
+          <p:cNvSpPr txBox="1"/>
+          <p:nvPr/>
+        </p:nvSpPr>
+        <p:spPr>
+          <a:xfrm>
+            <a:off x="9847052" y="3791828"/>
+            <a:ext cx="455844" cy="246011"/>
+          </a:xfrm>
+          <a:prstGeom prst="rect">
+            <a:avLst/>
+          </a:prstGeom>
+          <a:noFill/>
+        </p:spPr>
+        <p:txBody>
+          <a:bodyPr wrap="none" lIns="0" rIns="0" tIns="0" bIns="0" anchor="ctr">
+            <a:spAutoFit/>
+          </a:bodyPr>
+          <a:lstStyle/>
+          <a:p>
+            <a:pPr algn="ctr">
+              <a:spcBef>
+                <a:spcPts val="0"/>
+              </a:spcBef>
+              <a:spcAft>
+                <a:spcPts val="0"/>
+              </a:spcAft>
+            </a:pPr>
+            <a:r>
+              <a:rPr sz="1424" b="0">
+                <a:solidFill>
+                  <a:srgbClr val="20282C"/>
+                </a:solidFill>
+                <a:latin typeface="DejaVu Sans"/>
+              </a:rPr>
+              <a:t>I</a:t>
+            </a:r>
+          </a:p>
+        </p:txBody>
+      </p:sp>
+      <p:sp>
+        <p:nvSpPr>
+          <p:cNvPr id="51" name="Rectangle 50"/>
+          <p:cNvSpPr/>
+          <p:nvPr/>
+        </p:nvSpPr>
+        <p:spPr>
+          <a:xfrm>
+            <a:off x="10335456" y="1456530"/>
+            <a:ext cx="1448933" cy="651206"/>
+          </a:xfrm>
+          <a:prstGeom prst="rect">
+            <a:avLst/>
+          </a:prstGeom>
+          <a:solidFill>
+            <a:srgbClr val="FFFFFF"/>
+          </a:solidFill>
+          <a:ln w="15827">
+            <a:solidFill>
+              <a:srgbClr val="20282C"/>
+            </a:solidFill>
+          </a:ln>
+          <a:effectLst/>
+        </p:spPr>
+        <p:txBody>
+          <a:bodyPr rtlCol="0" anchor="ctr"/>
+          <a:lstStyle/>
+          <a:p>
+            <a:pPr algn="ctr"/>
+          </a:p>
+        </p:txBody>
+      </p:sp>
+      <p:sp>
+        <p:nvSpPr>
+          <p:cNvPr id="52" name="TextBox 51"/>
+          <p:cNvSpPr txBox="1"/>
+          <p:nvPr/>
+        </p:nvSpPr>
+        <p:spPr>
+          <a:xfrm>
+            <a:off x="10726202" y="1654515"/>
+            <a:ext cx="667442" cy="255236"/>
+          </a:xfrm>
+          <a:prstGeom prst="rect">
+            <a:avLst/>
+          </a:prstGeom>
+          <a:noFill/>
+        </p:spPr>
+        <p:txBody>
+          <a:bodyPr wrap="none" lIns="0" rIns="0" tIns="0" bIns="0" anchor="ctr">
+            <a:spAutoFit/>
+          </a:bodyPr>
+          <a:lstStyle/>
+          <a:p>
+            <a:pPr algn="ctr">
+              <a:spcBef>
+                <a:spcPts val="0"/>
+              </a:spcBef>
+              <a:spcAft>
+                <a:spcPts val="0"/>
+              </a:spcAft>
+            </a:pPr>
+            <a:r>
+              <a:rPr sz="1477" b="1">
+                <a:solidFill>
+                  <a:srgbClr val="20282C"/>
+                </a:solidFill>
+                <a:latin typeface="DejaVu Sans"/>
+              </a:rPr>
+              <a:t>Adam</a:t>
+            </a:r>
+          </a:p>
+        </p:txBody>
+      </p:sp>
+      <p:sp>
+        <p:nvSpPr>
+          <p:cNvPr id="53" name="Freeform 52"/>
+          <p:cNvSpPr/>
+          <p:nvPr/>
+        </p:nvSpPr>
+        <p:spPr>
+          <a:xfrm>
+            <a:off x="11059923" y="2107736"/>
+            <a:ext cx="0" cy="683767"/>
+          </a:xfrm>
+          <a:custGeom>
+            <a:avLst/>
+            <a:gdLst/>
+            <a:ahLst/>
+            <a:cxnLst/>
+            <a:rect l="l" t="t" r="r" b="b"/>
+            <a:pathLst>
+              <a:path w="0" h="683767">
+                <a:moveTo>
+                  <a:pt x="0" y="683767"/>
+                </a:moveTo>
+                <a:lnTo>
+                  <a:pt x="0" y="0"/>
+                </a:lnTo>
+              </a:path>
+            </a:pathLst>
+          </a:custGeom>
+          <a:noFill/>
+          <a:ln w="18089">
+            <a:solidFill>
+              <a:srgbClr val="20282C"/>
+            </a:solidFill>
+            <a:tailEnd type="triangle" w="sm" len="sm"/>
+          </a:ln>
+          <a:effectLst/>
+        </p:spPr>
+        <p:txBody>
+          <a:bodyPr rtlCol="0" anchor="ctr"/>
+          <a:lstStyle/>
+          <a:p>
+            <a:pPr algn="ctr"/>
+          </a:p>
+        </p:txBody>
+      </p:sp>
+      <p:sp>
+        <p:nvSpPr>
+          <p:cNvPr id="54" name="TextBox 53"/>
+          <p:cNvSpPr txBox="1"/>
+          <p:nvPr/>
+        </p:nvSpPr>
+        <p:spPr>
+          <a:xfrm>
+            <a:off x="10336672" y="2326614"/>
+            <a:ext cx="470909" cy="246011"/>
+          </a:xfrm>
+          <a:prstGeom prst="rect">
+            <a:avLst/>
+          </a:prstGeom>
+          <a:noFill/>
+        </p:spPr>
+        <p:txBody>
+          <a:bodyPr wrap="none" lIns="0" rIns="0" tIns="0" bIns="0" anchor="ctr">
+            <a:spAutoFit/>
+          </a:bodyPr>
+          <a:lstStyle/>
+          <a:p>
+            <a:pPr algn="r">
+              <a:spcBef>
+                <a:spcPts val="0"/>
+              </a:spcBef>
+              <a:spcAft>
+                <a:spcPts val="0"/>
+              </a:spcAft>
+            </a:pPr>
+            <a:r>
+              <a:rPr sz="1424" b="0">
+                <a:solidFill>
+                  <a:srgbClr val="20282C"/>
+                </a:solidFill>
+                <a:latin typeface="DejaVu Sans"/>
+              </a:rPr>
+              <a:t>∇θ L</a:t>
+            </a:r>
+          </a:p>
+        </p:txBody>
+      </p:sp>
+      <p:sp>
+        <p:nvSpPr>
+          <p:cNvPr id="55" name="Freeform 54"/>
+          <p:cNvSpPr/>
+          <p:nvPr/>
+        </p:nvSpPr>
+        <p:spPr>
+          <a:xfrm>
+            <a:off x="7079425" y="1782133"/>
+            <a:ext cx="3256031" cy="1041930"/>
+          </a:xfrm>
+          <a:custGeom>
+            <a:avLst/>
+            <a:gdLst/>
+            <a:ahLst/>
+            <a:cxnLst/>
+            <a:rect l="l" t="t" r="r" b="b"/>
+            <a:pathLst>
+              <a:path w="3256031" h="1041930">
+                <a:moveTo>
+                  <a:pt x="3256031" y="0"/>
+                </a:moveTo>
+                <a:lnTo>
+                  <a:pt x="407004" y="0"/>
+                </a:lnTo>
+                <a:lnTo>
+                  <a:pt x="407004" y="1041930"/>
+                </a:lnTo>
+                <a:lnTo>
+                  <a:pt x="0" y="1041930"/>
+                </a:lnTo>
+              </a:path>
+            </a:pathLst>
+          </a:custGeom>
+          <a:noFill/>
+          <a:ln w="18089">
+            <a:solidFill>
+              <a:srgbClr val="167568"/>
+            </a:solidFill>
+            <a:tailEnd type="triangle" w="sm" len="sm"/>
+          </a:ln>
+          <a:effectLst/>
+        </p:spPr>
+        <p:txBody>
+          <a:bodyPr rtlCol="0" anchor="ctr"/>
+          <a:lstStyle/>
+          <a:p>
+            <a:pPr algn="ctr"/>
+          </a:p>
+        </p:txBody>
+      </p:sp>
+      <p:sp>
+        <p:nvSpPr>
+          <p:cNvPr id="56" name="TextBox 55"/>
+          <p:cNvSpPr txBox="1"/>
+          <p:nvPr/>
+        </p:nvSpPr>
+        <p:spPr>
+          <a:xfrm>
+            <a:off x="8333011" y="1431205"/>
+            <a:ext cx="879100" cy="246011"/>
+          </a:xfrm>
+          <a:prstGeom prst="rect">
+            <a:avLst/>
+          </a:prstGeom>
+          <a:noFill/>
+        </p:spPr>
+        <p:txBody>
+          <a:bodyPr wrap="none" lIns="0" rIns="0" tIns="0" bIns="0" anchor="ctr">
+            <a:spAutoFit/>
+          </a:bodyPr>
+          <a:lstStyle/>
+          <a:p>
+            <a:pPr algn="ctr">
+              <a:spcBef>
+                <a:spcPts val="0"/>
+              </a:spcBef>
+              <a:spcAft>
+                <a:spcPts val="0"/>
+              </a:spcAft>
+            </a:pPr>
+            <a:r>
+              <a:rPr sz="1424" b="0">
+                <a:solidFill>
+                  <a:srgbClr val="167568"/>
+                </a:solidFill>
+                <a:latin typeface="DejaVu Sans"/>
+              </a:rPr>
+              <a:t>Update θ</a:t>
+            </a:r>
+          </a:p>
+        </p:txBody>
+      </p:sp>
+      <p:sp>
+        <p:nvSpPr>
+          <p:cNvPr id="57" name="Freeform 56"/>
+          <p:cNvSpPr/>
+          <p:nvPr/>
+        </p:nvSpPr>
+        <p:spPr>
+          <a:xfrm>
+            <a:off x="372000" y="4680001"/>
+            <a:ext cx="11444951" cy="0"/>
+          </a:xfrm>
+          <a:custGeom>
+            <a:avLst/>
+            <a:gdLst/>
+            <a:ahLst/>
+            <a:cxnLst/>
+            <a:rect l="l" t="t" r="r" b="b"/>
+            <a:pathLst>
+              <a:path w="11444951" h="0">
+                <a:moveTo>
+                  <a:pt x="0" y="0"/>
+                </a:moveTo>
+                <a:lnTo>
+                  <a:pt x="11444951" y="0"/>
+                </a:lnTo>
+              </a:path>
+            </a:pathLst>
+          </a:custGeom>
+          <a:noFill/>
+          <a:ln w="11305">
+            <a:solidFill>
+              <a:srgbClr val="C5CBCF"/>
+            </a:solidFill>
+          </a:ln>
+          <a:effectLst/>
+        </p:spPr>
+        <p:txBody>
+          <a:bodyPr rtlCol="0" anchor="ctr"/>
+          <a:lstStyle/>
+          <a:p>
+            <a:pPr algn="ctr"/>
           </a:p>
         </p:txBody>
       </p:sp>
       <p:pic>
         <p:nvPicPr>
-          <p:cNvPr id="47" name="Picture 46" descr="before.png"/>
+          <p:cNvPr id="58" name="Picture 57" descr="before.png"/>
           <p:cNvPicPr>
             <a:picLocks noChangeAspect="1"/>
           </p:cNvPicPr>
@@ -48114,29 +48699,65 @@
         </p:nvPicPr>
         <p:blipFill>
           <a:blip r:embed="rId4"/>
-          <a:srcRect t="6219" b="6219"/>
           <a:stretch>
             <a:fillRect/>
           </a:stretch>
         </p:blipFill>
         <p:spPr>
           <a:xfrm>
-            <a:off x="320040" y="3675887"/>
-            <a:ext cx="3063240" cy="2011680"/>
-          </a:xfrm>
-          <a:prstGeom prst="rect">
-            <a:avLst/>
-          </a:prstGeom>
-          <a:ln w="10160">
-            <a:solidFill>
-              <a:srgbClr val="607681"/>
-            </a:solidFill>
-          </a:ln>
+            <a:off x="372000" y="5021884"/>
+            <a:ext cx="1530334" cy="1147751"/>
+          </a:xfrm>
+          <a:prstGeom prst="rect">
+            <a:avLst/>
+          </a:prstGeom>
         </p:spPr>
       </p:pic>
+      <p:sp>
+        <p:nvSpPr>
+          <p:cNvPr id="59" name="TextBox 58"/>
+          <p:cNvSpPr txBox="1"/>
+          <p:nvPr/>
+        </p:nvSpPr>
+        <p:spPr>
+          <a:xfrm>
+            <a:off x="336396" y="4743765"/>
+            <a:ext cx="1601544" cy="230635"/>
+          </a:xfrm>
+          <a:prstGeom prst="rect">
+            <a:avLst/>
+          </a:prstGeom>
+          <a:noFill/>
+        </p:spPr>
+        <p:txBody>
+          <a:bodyPr wrap="none" lIns="0" rIns="0" tIns="0" bIns="0" anchor="ctr">
+            <a:spAutoFit/>
+          </a:bodyPr>
+          <a:lstStyle/>
+          <a:p>
+            <a:pPr algn="ctr">
+              <a:spcBef>
+                <a:spcPts val="0"/>
+              </a:spcBef>
+              <a:spcAft>
+                <a:spcPts val="0"/>
+              </a:spcAft>
+            </a:pPr>
+            <a:r>
+              <a:rPr sz="1335" b="0">
+                <a:solidFill>
+                  <a:srgbClr val="20282C"/>
+                </a:solidFill>
+                <a:latin typeface="DejaVu Sans"/>
+              </a:rPr>
+              <a:t>Before refinement</a:t>
+            </a:r>
+          </a:p>
+        </p:txBody>
+      </p:sp>
       <p:pic>
         <p:nvPicPr>
-          <p:cNvPr id="48" name="Picture 47" descr="after.png"/>
+          <p:cNvPr id="60" name="Picture 59" descr="after.png"/>
           <p:cNvPicPr>
             <a:picLocks noChangeAspect="1"/>
           </p:cNvPicPr>
@@ -48144,166 +48765,99 @@
         </p:nvPicPr>
         <p:blipFill>
           <a:blip r:embed="rId5"/>
-          <a:srcRect t="6219" b="6219"/>
           <a:stretch>
             <a:fillRect/>
           </a:stretch>
         </p:blipFill>
         <p:spPr>
           <a:xfrm>
-            <a:off x="3675887" y="3675887"/>
-            <a:ext cx="3063240" cy="2011680"/>
-          </a:xfrm>
-          <a:prstGeom prst="rect">
-            <a:avLst/>
-          </a:prstGeom>
-          <a:ln w="10160">
-            <a:solidFill>
-              <a:srgbClr val="168077"/>
-            </a:solidFill>
-          </a:ln>
+            <a:off x="2748903" y="5021884"/>
+            <a:ext cx="1530334" cy="1147751"/>
+          </a:xfrm>
+          <a:prstGeom prst="rect">
+            <a:avLst/>
+          </a:prstGeom>
         </p:spPr>
       </p:pic>
       <p:sp>
         <p:nvSpPr>
-          <p:cNvPr id="49" name="TextBox 48"/>
-          <p:cNvSpPr txBox="1"/>
-          <p:nvPr/>
-        </p:nvSpPr>
-        <p:spPr>
-          <a:xfrm>
-            <a:off x="320040" y="5742432"/>
-            <a:ext cx="3063240" cy="274320"/>
-          </a:xfrm>
-          <a:prstGeom prst="rect">
-            <a:avLst/>
-          </a:prstGeom>
-          <a:noFill/>
-        </p:spPr>
-        <p:txBody>
-          <a:bodyPr wrap="none" lIns="27432" rIns="27432" tIns="9144" bIns="9144" anchor="ctr">
-            <a:spAutoFit/>
-          </a:bodyPr>
-          <a:lstStyle/>
-          <a:p>
-            <a:pPr algn="ctr"/>
-            <a:r>
-              <a:rPr sz="1000" b="1">
-                <a:solidFill>
-                  <a:srgbClr val="607681"/>
-                </a:solidFill>
-                <a:latin typeface="Arial"/>
-              </a:rPr>
-              <a:t>predicted map</a:t>
-            </a:r>
-          </a:p>
-        </p:txBody>
-      </p:sp>
-      <p:sp>
-        <p:nvSpPr>
-          <p:cNvPr id="50" name="TextBox 49"/>
-          <p:cNvSpPr txBox="1"/>
-          <p:nvPr/>
-        </p:nvSpPr>
-        <p:spPr>
-          <a:xfrm>
-            <a:off x="3675887" y="5742432"/>
-            <a:ext cx="3063240" cy="274320"/>
-          </a:xfrm>
-          <a:prstGeom prst="rect">
-            <a:avLst/>
-          </a:prstGeom>
-          <a:noFill/>
-        </p:spPr>
-        <p:txBody>
-          <a:bodyPr wrap="none" lIns="27432" rIns="27432" tIns="9144" bIns="9144" anchor="ctr">
-            <a:spAutoFit/>
-          </a:bodyPr>
-          <a:lstStyle/>
-          <a:p>
-            <a:pPr algn="ctr"/>
-            <a:r>
-              <a:rPr sz="1000" b="1">
-                <a:solidFill>
-                  <a:srgbClr val="168077"/>
-                </a:solidFill>
-                <a:latin typeface="Arial"/>
-              </a:rPr>
-              <a:t>same camera after refinement</a:t>
-            </a:r>
-          </a:p>
-        </p:txBody>
-      </p:sp>
-      <p:cxnSp>
-        <p:nvCxnSpPr>
-          <p:cNvPr id="51" name="Connector 50"/>
-          <p:cNvCxnSpPr/>
-          <p:nvPr/>
-        </p:nvCxnSpPr>
-        <p:spPr>
-          <a:xfrm>
-            <a:off x="3401568" y="4681728"/>
-            <a:ext cx="246888" cy="0"/>
-          </a:xfrm>
-          <a:prstGeom prst="line">
-            <a:avLst/>
-          </a:prstGeom>
-          <a:ln w="20320">
-            <a:solidFill>
-              <a:srgbClr val="168077"/>
-            </a:solidFill>
-          </a:ln>
-        </p:spPr>
-        <p:style>
-          <a:lnRef idx="2">
-            <a:schemeClr val="accent1"/>
-          </a:lnRef>
-          <a:fillRef idx="0">
-            <a:schemeClr val="accent1"/>
-          </a:fillRef>
-          <a:effectRef idx="1">
-            <a:schemeClr val="accent1"/>
-          </a:effectRef>
-          <a:fontRef idx="minor">
-            <a:schemeClr val="tx1"/>
-          </a:fontRef>
-        </p:style>
-      </p:cxnSp>
-      <p:sp>
-        <p:nvSpPr>
-          <p:cNvPr id="52" name="Isosceles Triangle 51"/>
+          <p:cNvPr id="61" name="TextBox 60"/>
+          <p:cNvSpPr txBox="1"/>
+          <p:nvPr/>
+        </p:nvSpPr>
+        <p:spPr>
+          <a:xfrm>
+            <a:off x="2779264" y="4743765"/>
+            <a:ext cx="1469612" cy="230635"/>
+          </a:xfrm>
+          <a:prstGeom prst="rect">
+            <a:avLst/>
+          </a:prstGeom>
+          <a:noFill/>
+        </p:spPr>
+        <p:txBody>
+          <a:bodyPr wrap="none" lIns="0" rIns="0" tIns="0" bIns="0" anchor="ctr">
+            <a:spAutoFit/>
+          </a:bodyPr>
+          <a:lstStyle/>
+          <a:p>
+            <a:pPr algn="ctr">
+              <a:spcBef>
+                <a:spcPts val="0"/>
+              </a:spcBef>
+              <a:spcAft>
+                <a:spcPts val="0"/>
+              </a:spcAft>
+            </a:pPr>
+            <a:r>
+              <a:rPr sz="1335" b="0">
+                <a:solidFill>
+                  <a:srgbClr val="20282C"/>
+                </a:solidFill>
+                <a:latin typeface="DejaVu Sans"/>
+              </a:rPr>
+              <a:t>After refinement</a:t>
+            </a:r>
+          </a:p>
+        </p:txBody>
+      </p:sp>
+      <p:sp>
+        <p:nvSpPr>
+          <p:cNvPr id="62" name="Freeform 61"/>
           <p:cNvSpPr/>
           <p:nvPr/>
         </p:nvSpPr>
         <p:spPr>
-          <a:xfrm rot="5400000">
-            <a:off x="3598164" y="4631436"/>
-            <a:ext cx="100584" cy="100584"/>
-          </a:xfrm>
-          <a:prstGeom prst="triangle">
-            <a:avLst/>
-          </a:prstGeom>
-          <a:solidFill>
-            <a:srgbClr val="168077"/>
-          </a:solidFill>
-          <a:ln>
-            <a:noFill/>
-          </a:ln>
-        </p:spPr>
-        <p:style>
-          <a:lnRef idx="1">
-            <a:schemeClr val="accent1"/>
-          </a:lnRef>
-          <a:fillRef idx="3">
-            <a:schemeClr val="accent1"/>
-          </a:fillRef>
-          <a:effectRef idx="2">
-            <a:schemeClr val="accent1"/>
-          </a:effectRef>
-          <a:fontRef idx="minor">
-            <a:schemeClr val="lt1"/>
-          </a:fontRef>
-        </p:style>
+          <a:xfrm>
+            <a:off x="1902335" y="5575410"/>
+            <a:ext cx="846568" cy="0"/>
+          </a:xfrm>
+          <a:custGeom>
+            <a:avLst/>
+            <a:gdLst/>
+            <a:ahLst/>
+            <a:cxnLst/>
+            <a:rect l="l" t="t" r="r" b="b"/>
+            <a:pathLst>
+              <a:path w="846568" h="0">
+                <a:moveTo>
+                  <a:pt x="0" y="0"/>
+                </a:moveTo>
+                <a:lnTo>
+                  <a:pt x="846568" y="0"/>
+                </a:lnTo>
+              </a:path>
+            </a:pathLst>
+          </a:custGeom>
+          <a:noFill/>
+          <a:ln w="18089">
+            <a:solidFill>
+              <a:srgbClr val="167568"/>
+            </a:solidFill>
+            <a:tailEnd type="triangle" w="sm" len="sm"/>
+          </a:ln>
+          <a:effectLst/>
+        </p:spPr>
         <p:txBody>
           <a:bodyPr rtlCol="0" anchor="ctr"/>
           <a:lstStyle/>
@@ -48314,491 +48868,148 @@
       </p:sp>
       <p:sp>
         <p:nvSpPr>
-          <p:cNvPr id="53" name="Rounded Rectangle 52"/>
-          <p:cNvSpPr/>
-          <p:nvPr/>
-        </p:nvSpPr>
-        <p:spPr>
-          <a:xfrm>
-            <a:off x="7150608" y="3675887"/>
-            <a:ext cx="1901952" cy="2011680"/>
-          </a:xfrm>
-          <a:prstGeom prst="roundRect">
-            <a:avLst>
-              <a:gd name="adj" fmla="val 8000"/>
-            </a:avLst>
-          </a:prstGeom>
-          <a:solidFill>
-            <a:srgbClr val="E9F6F3"/>
-          </a:solidFill>
-          <a:ln w="12700">
-            <a:solidFill>
-              <a:srgbClr val="168077"/>
-            </a:solidFill>
-          </a:ln>
-        </p:spPr>
-        <p:style>
-          <a:lnRef idx="1">
-            <a:schemeClr val="accent1"/>
-          </a:lnRef>
-          <a:fillRef idx="3">
-            <a:schemeClr val="accent1"/>
-          </a:fillRef>
-          <a:effectRef idx="2">
-            <a:schemeClr val="accent1"/>
-          </a:effectRef>
-          <a:fontRef idx="minor">
-            <a:schemeClr val="lt1"/>
-          </a:fontRef>
-        </p:style>
-        <p:txBody>
-          <a:bodyPr rtlCol="0" anchor="ctr"/>
-          <a:lstStyle/>
-          <a:p>
-            <a:pPr algn="ctr"/>
-          </a:p>
-        </p:txBody>
-      </p:sp>
-      <p:sp>
-        <p:nvSpPr>
-          <p:cNvPr id="54" name="TextBox 53"/>
-          <p:cNvSpPr txBox="1"/>
-          <p:nvPr/>
-        </p:nvSpPr>
-        <p:spPr>
-          <a:xfrm>
-            <a:off x="7260336" y="3749039"/>
-            <a:ext cx="1682496" cy="256032"/>
-          </a:xfrm>
-          <a:prstGeom prst="rect">
-            <a:avLst/>
-          </a:prstGeom>
-          <a:noFill/>
-        </p:spPr>
-        <p:txBody>
-          <a:bodyPr wrap="none" lIns="27432" rIns="27432" tIns="9144" bIns="9144" anchor="ctr">
-            <a:spAutoFit/>
-          </a:bodyPr>
-          <a:lstStyle/>
-          <a:p>
-            <a:pPr algn="l"/>
-            <a:r>
-              <a:rPr sz="1200" b="1">
-                <a:solidFill>
-                  <a:srgbClr val="18323F"/>
-                </a:solidFill>
-                <a:latin typeface="Arial"/>
-              </a:rPr>
-              <a:t>Supervision sampler</a:t>
-            </a:r>
-          </a:p>
-        </p:txBody>
-      </p:sp>
-      <p:sp>
-        <p:nvSpPr>
-          <p:cNvPr id="55" name="TextBox 54"/>
-          <p:cNvSpPr txBox="1"/>
-          <p:nvPr/>
-        </p:nvSpPr>
-        <p:spPr>
-          <a:xfrm>
-            <a:off x="7260336" y="4032503"/>
-            <a:ext cx="1682496" cy="1600200"/>
-          </a:xfrm>
-          <a:prstGeom prst="rect">
-            <a:avLst/>
-          </a:prstGeom>
-          <a:noFill/>
-        </p:spPr>
-        <p:txBody>
-          <a:bodyPr wrap="none" lIns="27432" rIns="27432" tIns="9144" bIns="9144" anchor="t">
-            <a:spAutoFit/>
-          </a:bodyPr>
-          <a:lstStyle/>
-          <a:p>
-            <a:pPr algn="l"/>
-            <a:r>
-              <a:rPr sz="869" b="0">
-                <a:solidFill>
-                  <a:srgbClr val="607681"/>
-                </a:solidFill>
-                <a:latin typeface="Arial"/>
-              </a:rPr>
-              <a:t>200-frame reservoir
-64 recent frames
-30% recent sampling</a:t>
-            </a:r>
-          </a:p>
-        </p:txBody>
-      </p:sp>
-      <p:sp>
-        <p:nvSpPr>
-          <p:cNvPr id="56" name="Trapezoid 55"/>
-          <p:cNvSpPr/>
-          <p:nvPr/>
-        </p:nvSpPr>
-        <p:spPr>
-          <a:xfrm rot="5400000">
-            <a:off x="7452360" y="4983480"/>
-            <a:ext cx="341985" cy="241401"/>
-          </a:xfrm>
-          <a:prstGeom prst="trapezoid">
-            <a:avLst/>
-          </a:prstGeom>
-          <a:solidFill>
-            <a:srgbClr val="FFFFFF"/>
-          </a:solidFill>
-          <a:ln w="12700">
-            <a:solidFill>
-              <a:srgbClr val="168077"/>
-            </a:solidFill>
-          </a:ln>
-        </p:spPr>
-        <p:style>
-          <a:lnRef idx="1">
-            <a:schemeClr val="accent1"/>
-          </a:lnRef>
-          <a:fillRef idx="3">
-            <a:schemeClr val="accent1"/>
-          </a:fillRef>
-          <a:effectRef idx="2">
-            <a:schemeClr val="accent1"/>
-          </a:effectRef>
-          <a:fontRef idx="minor">
-            <a:schemeClr val="lt1"/>
-          </a:fontRef>
-        </p:style>
-        <p:txBody>
-          <a:bodyPr rtlCol="0" anchor="ctr"/>
-          <a:lstStyle/>
-          <a:p>
-            <a:pPr algn="ctr"/>
-          </a:p>
-        </p:txBody>
-      </p:sp>
-      <p:cxnSp>
-        <p:nvCxnSpPr>
-          <p:cNvPr id="57" name="Connector 56"/>
-          <p:cNvCxnSpPr/>
-          <p:nvPr/>
-        </p:nvCxnSpPr>
-        <p:spPr>
-          <a:xfrm>
-            <a:off x="7623352" y="5104180"/>
-            <a:ext cx="261519" cy="0"/>
-          </a:xfrm>
-          <a:prstGeom prst="line">
-            <a:avLst/>
-          </a:prstGeom>
-          <a:ln w="12700">
-            <a:solidFill>
-              <a:srgbClr val="168077"/>
-            </a:solidFill>
-          </a:ln>
-        </p:spPr>
-        <p:style>
-          <a:lnRef idx="2">
-            <a:schemeClr val="accent1"/>
-          </a:lnRef>
-          <a:fillRef idx="0">
-            <a:schemeClr val="accent1"/>
-          </a:fillRef>
-          <a:effectRef idx="1">
-            <a:schemeClr val="accent1"/>
-          </a:effectRef>
-          <a:fontRef idx="minor">
-            <a:schemeClr val="tx1"/>
-          </a:fontRef>
-        </p:style>
-      </p:cxnSp>
-      <p:sp>
-        <p:nvSpPr>
-          <p:cNvPr id="58" name="Isosceles Triangle 57"/>
-          <p:cNvSpPr/>
-          <p:nvPr/>
-        </p:nvSpPr>
-        <p:spPr>
-          <a:xfrm rot="5400000">
-            <a:off x="7834579" y="5053888"/>
-            <a:ext cx="100584" cy="100584"/>
-          </a:xfrm>
-          <a:prstGeom prst="triangle">
-            <a:avLst/>
-          </a:prstGeom>
-          <a:solidFill>
-            <a:srgbClr val="168077"/>
-          </a:solidFill>
-          <a:ln>
-            <a:noFill/>
-          </a:ln>
-        </p:spPr>
-        <p:style>
-          <a:lnRef idx="1">
-            <a:schemeClr val="accent1"/>
-          </a:lnRef>
-          <a:fillRef idx="3">
-            <a:schemeClr val="accent1"/>
-          </a:fillRef>
-          <a:effectRef idx="2">
-            <a:schemeClr val="accent1"/>
-          </a:effectRef>
-          <a:fontRef idx="minor">
-            <a:schemeClr val="lt1"/>
-          </a:fontRef>
-        </p:style>
-        <p:txBody>
-          <a:bodyPr rtlCol="0" anchor="ctr"/>
-          <a:lstStyle/>
-          <a:p>
-            <a:pPr algn="ctr"/>
-          </a:p>
-        </p:txBody>
-      </p:sp>
-      <p:sp>
-        <p:nvSpPr>
-          <p:cNvPr id="59" name="Trapezoid 58"/>
-          <p:cNvSpPr/>
-          <p:nvPr/>
-        </p:nvSpPr>
-        <p:spPr>
-          <a:xfrm rot="5400000">
-            <a:off x="8001000" y="4910328"/>
-            <a:ext cx="341985" cy="241401"/>
-          </a:xfrm>
-          <a:prstGeom prst="trapezoid">
-            <a:avLst/>
-          </a:prstGeom>
-          <a:solidFill>
-            <a:srgbClr val="FFFFFF"/>
-          </a:solidFill>
-          <a:ln w="12700">
-            <a:solidFill>
-              <a:srgbClr val="3478A5"/>
-            </a:solidFill>
-          </a:ln>
-        </p:spPr>
-        <p:style>
-          <a:lnRef idx="1">
-            <a:schemeClr val="accent1"/>
-          </a:lnRef>
-          <a:fillRef idx="3">
-            <a:schemeClr val="accent1"/>
-          </a:fillRef>
-          <a:effectRef idx="2">
-            <a:schemeClr val="accent1"/>
-          </a:effectRef>
-          <a:fontRef idx="minor">
-            <a:schemeClr val="lt1"/>
-          </a:fontRef>
-        </p:style>
-        <p:txBody>
-          <a:bodyPr rtlCol="0" anchor="ctr"/>
-          <a:lstStyle/>
-          <a:p>
-            <a:pPr algn="ctr"/>
-          </a:p>
-        </p:txBody>
-      </p:sp>
-      <p:cxnSp>
-        <p:nvCxnSpPr>
-          <p:cNvPr id="60" name="Connector 59"/>
-          <p:cNvCxnSpPr/>
-          <p:nvPr/>
-        </p:nvCxnSpPr>
-        <p:spPr>
-          <a:xfrm>
-            <a:off x="8171992" y="5031028"/>
-            <a:ext cx="261519" cy="0"/>
-          </a:xfrm>
-          <a:prstGeom prst="line">
-            <a:avLst/>
-          </a:prstGeom>
-          <a:ln w="12700">
-            <a:solidFill>
-              <a:srgbClr val="3478A5"/>
-            </a:solidFill>
-          </a:ln>
-        </p:spPr>
-        <p:style>
-          <a:lnRef idx="2">
-            <a:schemeClr val="accent1"/>
-          </a:lnRef>
-          <a:fillRef idx="0">
-            <a:schemeClr val="accent1"/>
-          </a:fillRef>
-          <a:effectRef idx="1">
-            <a:schemeClr val="accent1"/>
-          </a:effectRef>
-          <a:fontRef idx="minor">
-            <a:schemeClr val="tx1"/>
-          </a:fontRef>
-        </p:style>
-      </p:cxnSp>
-      <p:sp>
-        <p:nvSpPr>
-          <p:cNvPr id="61" name="Isosceles Triangle 60"/>
-          <p:cNvSpPr/>
-          <p:nvPr/>
-        </p:nvSpPr>
-        <p:spPr>
-          <a:xfrm rot="5400000">
-            <a:off x="8383219" y="4980736"/>
-            <a:ext cx="100584" cy="100584"/>
-          </a:xfrm>
-          <a:prstGeom prst="triangle">
-            <a:avLst/>
-          </a:prstGeom>
-          <a:solidFill>
-            <a:srgbClr val="3478A5"/>
-          </a:solidFill>
-          <a:ln>
-            <a:noFill/>
-          </a:ln>
-        </p:spPr>
-        <p:style>
-          <a:lnRef idx="1">
-            <a:schemeClr val="accent1"/>
-          </a:lnRef>
-          <a:fillRef idx="3">
-            <a:schemeClr val="accent1"/>
-          </a:fillRef>
-          <a:effectRef idx="2">
-            <a:schemeClr val="accent1"/>
-          </a:effectRef>
-          <a:fontRef idx="minor">
-            <a:schemeClr val="lt1"/>
-          </a:fontRef>
-        </p:style>
-        <p:txBody>
-          <a:bodyPr rtlCol="0" anchor="ctr"/>
-          <a:lstStyle/>
-          <a:p>
-            <a:pPr algn="ctr"/>
-          </a:p>
-        </p:txBody>
-      </p:sp>
-      <p:cxnSp>
-        <p:nvCxnSpPr>
-          <p:cNvPr id="62" name="Connector 61"/>
-          <p:cNvCxnSpPr/>
-          <p:nvPr/>
-        </p:nvCxnSpPr>
-        <p:spPr>
-          <a:xfrm>
-            <a:off x="9070848" y="4681728"/>
-            <a:ext cx="301752" cy="0"/>
-          </a:xfrm>
-          <a:prstGeom prst="line">
-            <a:avLst/>
-          </a:prstGeom>
-          <a:ln w="20320">
-            <a:solidFill>
-              <a:srgbClr val="A14D78"/>
-            </a:solidFill>
-          </a:ln>
-        </p:spPr>
-        <p:style>
-          <a:lnRef idx="2">
-            <a:schemeClr val="accent1"/>
-          </a:lnRef>
-          <a:fillRef idx="0">
-            <a:schemeClr val="accent1"/>
-          </a:fillRef>
-          <a:effectRef idx="1">
-            <a:schemeClr val="accent1"/>
-          </a:effectRef>
-          <a:fontRef idx="minor">
-            <a:schemeClr val="tx1"/>
-          </a:fontRef>
-        </p:style>
-      </p:cxnSp>
-      <p:sp>
-        <p:nvSpPr>
-          <p:cNvPr id="63" name="Isosceles Triangle 62"/>
-          <p:cNvSpPr/>
-          <p:nvPr/>
-        </p:nvSpPr>
-        <p:spPr>
-          <a:xfrm rot="5400000">
-            <a:off x="9322308" y="4631436"/>
-            <a:ext cx="100584" cy="100584"/>
-          </a:xfrm>
-          <a:prstGeom prst="triangle">
-            <a:avLst/>
-          </a:prstGeom>
-          <a:solidFill>
-            <a:srgbClr val="A14D78"/>
-          </a:solidFill>
-          <a:ln>
-            <a:noFill/>
-          </a:ln>
-        </p:spPr>
-        <p:style>
-          <a:lnRef idx="1">
-            <a:schemeClr val="accent1"/>
-          </a:lnRef>
-          <a:fillRef idx="3">
-            <a:schemeClr val="accent1"/>
-          </a:fillRef>
-          <a:effectRef idx="2">
-            <a:schemeClr val="accent1"/>
-          </a:effectRef>
-          <a:fontRef idx="minor">
-            <a:schemeClr val="lt1"/>
-          </a:fontRef>
-        </p:style>
-        <p:txBody>
-          <a:bodyPr rtlCol="0" anchor="ctr"/>
-          <a:lstStyle/>
-          <a:p>
-            <a:pPr algn="ctr"/>
-          </a:p>
-        </p:txBody>
-      </p:sp>
-      <p:sp>
-        <p:nvSpPr>
-          <p:cNvPr id="64" name="Rounded Rectangle 63"/>
-          <p:cNvSpPr/>
-          <p:nvPr/>
-        </p:nvSpPr>
-        <p:spPr>
-          <a:xfrm>
-            <a:off x="9400032" y="3675887"/>
-            <a:ext cx="2450592" cy="2011680"/>
-          </a:xfrm>
-          <a:prstGeom prst="roundRect">
-            <a:avLst>
-              <a:gd name="adj" fmla="val 8000"/>
-            </a:avLst>
-          </a:prstGeom>
-          <a:solidFill>
-            <a:srgbClr val="FBEFE8"/>
-          </a:solidFill>
-          <a:ln w="12700">
-            <a:solidFill>
-              <a:srgbClr val="C36B31"/>
-            </a:solidFill>
-          </a:ln>
-        </p:spPr>
-        <p:style>
-          <a:lnRef idx="1">
-            <a:schemeClr val="accent1"/>
-          </a:lnRef>
-          <a:fillRef idx="3">
-            <a:schemeClr val="accent1"/>
-          </a:fillRef>
-          <a:effectRef idx="2">
-            <a:schemeClr val="accent1"/>
-          </a:effectRef>
-          <a:fontRef idx="minor">
-            <a:schemeClr val="lt1"/>
-          </a:fontRef>
-        </p:style>
-        <p:txBody>
-          <a:bodyPr rtlCol="0" anchor="ctr"/>
-          <a:lstStyle/>
-          <a:p>
-            <a:pPr algn="ctr"/>
+          <p:cNvPr id="63" name="TextBox 62"/>
+          <p:cNvSpPr txBox="1"/>
+          <p:nvPr/>
+        </p:nvSpPr>
+        <p:spPr>
+          <a:xfrm>
+            <a:off x="5239767" y="4848501"/>
+            <a:ext cx="2441797" cy="249086"/>
+          </a:xfrm>
+          <a:prstGeom prst="rect">
+            <a:avLst/>
+          </a:prstGeom>
+          <a:noFill/>
+        </p:spPr>
+        <p:txBody>
+          <a:bodyPr wrap="none" lIns="0" rIns="0" tIns="0" bIns="0" anchor="ctr">
+            <a:spAutoFit/>
+          </a:bodyPr>
+          <a:lstStyle/>
+          <a:p>
+            <a:pPr algn="l">
+              <a:spcBef>
+                <a:spcPts val="0"/>
+              </a:spcBef>
+              <a:spcAft>
+                <a:spcPts val="0"/>
+              </a:spcAft>
+            </a:pPr>
+            <a:r>
+              <a:rPr sz="1442" b="1">
+                <a:solidFill>
+                  <a:srgbClr val="20282C"/>
+                </a:solidFill>
+                <a:latin typeface="DejaVu Sans"/>
+              </a:rPr>
+              <a:t>Shared-anchor relation</a:t>
+            </a:r>
+          </a:p>
+        </p:txBody>
+      </p:sp>
+      <p:sp>
+        <p:nvSpPr>
+          <p:cNvPr id="64" name="TextBox 63"/>
+          <p:cNvSpPr txBox="1"/>
+          <p:nvPr/>
+        </p:nvSpPr>
+        <p:spPr>
+          <a:xfrm>
+            <a:off x="5239767" y="5193730"/>
+            <a:ext cx="3549342" cy="307514"/>
+          </a:xfrm>
+          <a:prstGeom prst="rect">
+            <a:avLst/>
+          </a:prstGeom>
+          <a:noFill/>
+        </p:spPr>
+        <p:txBody>
+          <a:bodyPr wrap="none" lIns="0" rIns="0" tIns="0" bIns="0" anchor="ctr">
+            <a:spAutoFit/>
+          </a:bodyPr>
+          <a:lstStyle/>
+          <a:p>
+            <a:pPr algn="l">
+              <a:spcBef>
+                <a:spcPts val="0"/>
+              </a:spcBef>
+              <a:spcAft>
+                <a:spcPts val="0"/>
+              </a:spcAft>
+            </a:pPr>
+            <a:r>
+              <a:rPr sz="1780" b="0">
+                <a:solidFill>
+                  <a:srgbClr val="20282C"/>
+                </a:solidFill>
+                <a:latin typeface="DejaVu Sans"/>
+              </a:rPr>
+              <a:t>T</a:t>
+            </a:r>
+            <a:r>
+              <a:rPr sz="1246" b="0" baseline="-25000">
+                <a:solidFill>
+                  <a:srgbClr val="20282C"/>
+                </a:solidFill>
+                <a:latin typeface="DejaVu Sans"/>
+              </a:rPr>
+              <a:t>WCf</a:t>
+            </a:r>
+            <a:r>
+              <a:rPr sz="1246" b="0" baseline="35000">
+                <a:solidFill>
+                  <a:srgbClr val="20282C"/>
+                </a:solidFill>
+                <a:latin typeface="DejaVu Sans"/>
+              </a:rPr>
+              <a:t>−1</a:t>
+            </a:r>
+            <a:r>
+              <a:rPr sz="1780" b="0">
+                <a:solidFill>
+                  <a:srgbClr val="20282C"/>
+                </a:solidFill>
+                <a:latin typeface="DejaVu Sans"/>
+              </a:rPr>
+              <a:t> T</a:t>
+            </a:r>
+            <a:r>
+              <a:rPr sz="1246" b="0" baseline="-25000">
+                <a:solidFill>
+                  <a:srgbClr val="20282C"/>
+                </a:solidFill>
+                <a:latin typeface="DejaVu Sans"/>
+              </a:rPr>
+              <a:t>WCk</a:t>
+            </a:r>
+            <a:r>
+              <a:rPr sz="1780" b="0">
+                <a:solidFill>
+                  <a:srgbClr val="20282C"/>
+                </a:solidFill>
+                <a:latin typeface="DejaVu Sans"/>
+              </a:rPr>
+              <a:t> = T</a:t>
+            </a:r>
+            <a:r>
+              <a:rPr sz="1246" b="0" baseline="-25000">
+                <a:solidFill>
+                  <a:srgbClr val="20282C"/>
+                </a:solidFill>
+                <a:latin typeface="DejaVu Sans"/>
+              </a:rPr>
+              <a:t>CkCf</a:t>
+            </a:r>
+            <a:r>
+              <a:rPr sz="1246" b="0" baseline="35000">
+                <a:solidFill>
+                  <a:srgbClr val="20282C"/>
+                </a:solidFill>
+                <a:latin typeface="DejaVu Sans"/>
+              </a:rPr>
+              <a:t>−1</a:t>
+            </a:r>
           </a:p>
         </p:txBody>
       </p:sp>
@@ -48810,29 +49021,36 @@
         </p:nvSpPr>
         <p:spPr>
           <a:xfrm>
-            <a:off x="9509759" y="3749039"/>
-            <a:ext cx="2231136" cy="256032"/>
-          </a:xfrm>
-          <a:prstGeom prst="rect">
-            <a:avLst/>
-          </a:prstGeom>
-          <a:noFill/>
-        </p:spPr>
-        <p:txBody>
-          <a:bodyPr wrap="none" lIns="27432" rIns="27432" tIns="9144" bIns="9144" anchor="ctr">
-            <a:spAutoFit/>
-          </a:bodyPr>
-          <a:lstStyle/>
-          <a:p>
-            <a:pPr algn="l"/>
-            <a:r>
-              <a:rPr sz="1200" b="1">
-                <a:solidFill>
-                  <a:srgbClr val="18323F"/>
-                </a:solidFill>
-                <a:latin typeface="Arial"/>
-              </a:rPr>
-              <a:t>Optional initialisation</a:t>
+            <a:off x="5239767" y="5634561"/>
+            <a:ext cx="4541370" cy="239860"/>
+          </a:xfrm>
+          <a:prstGeom prst="rect">
+            <a:avLst/>
+          </a:prstGeom>
+          <a:noFill/>
+        </p:spPr>
+        <p:txBody>
+          <a:bodyPr wrap="none" lIns="0" rIns="0" tIns="0" bIns="0" anchor="ctr">
+            <a:spAutoFit/>
+          </a:bodyPr>
+          <a:lstStyle/>
+          <a:p>
+            <a:pPr algn="l">
+              <a:spcBef>
+                <a:spcPts val="0"/>
+              </a:spcBef>
+              <a:spcAft>
+                <a:spcPts val="0"/>
+              </a:spcAft>
+            </a:pPr>
+            <a:r>
+              <a:rPr sz="1388" b="0">
+                <a:solidFill>
+                  <a:srgbClr val="20282C"/>
+                </a:solidFill>
+                <a:latin typeface="DejaVu Sans"/>
+              </a:rPr>
+              <a:t>Pose corrections move map and cameras together.</a:t>
             </a:r>
           </a:p>
         </p:txBody>
@@ -48845,32 +49063,36 @@
         </p:nvSpPr>
         <p:spPr>
           <a:xfrm>
-            <a:off x="9509759" y="4032503"/>
-            <a:ext cx="2231136" cy="1600200"/>
-          </a:xfrm>
-          <a:prstGeom prst="rect">
-            <a:avLst/>
-          </a:prstGeom>
-          <a:noFill/>
-        </p:spPr>
-        <p:txBody>
-          <a:bodyPr wrap="none" lIns="27432" rIns="27432" tIns="9144" bIns="9144" anchor="t">
-            <a:spAutoFit/>
-          </a:bodyPr>
-          <a:lstStyle/>
-          <a:p>
-            <a:pPr algn="l"/>
-            <a:r>
-              <a:rPr sz="869" b="0">
-                <a:solidFill>
-                  <a:srgbClr val="607681"/>
-                </a:solidFill>
-                <a:latin typeface="Arial"/>
-              </a:rPr>
-              <a:t>head-only adaptation
-opacity attenuation
-External comparison:
-released head; attenuation off</a:t>
+            <a:off x="5239767" y="5997337"/>
+            <a:ext cx="3578746" cy="230635"/>
+          </a:xfrm>
+          <a:prstGeom prst="rect">
+            <a:avLst/>
+          </a:prstGeom>
+          <a:noFill/>
+        </p:spPr>
+        <p:txBody>
+          <a:bodyPr wrap="none" lIns="0" rIns="0" tIns="0" bIns="0" anchor="ctr">
+            <a:spAutoFit/>
+          </a:bodyPr>
+          <a:lstStyle/>
+          <a:p>
+            <a:pPr algn="l">
+              <a:spcBef>
+                <a:spcPts val="0"/>
+              </a:spcBef>
+              <a:spcAft>
+                <a:spcPts val="0"/>
+              </a:spcAft>
+            </a:pPr>
+            <a:r>
+              <a:rPr sz="1335" b="0">
+                <a:solidFill>
+                  <a:srgbClr val="59636A"/>
+                </a:solidFill>
+                <a:latin typeface="DejaVu Sans"/>
+              </a:rPr>
+              <a:t>Optional initialisation: Chs. 5–6 · Eq. (6.1)</a:t>
             </a:r>
           </a:p>
         </p:txBody>
@@ -48878,76 +49100,6 @@
       <p:sp>
         <p:nvSpPr>
           <p:cNvPr id="67" name="TextBox 66"/>
-          <p:cNvSpPr txBox="1"/>
-          <p:nvPr/>
-        </p:nvSpPr>
-        <p:spPr>
-          <a:xfrm>
-            <a:off x="9509760" y="5742432"/>
-            <a:ext cx="2212848" cy="274320"/>
-          </a:xfrm>
-          <a:prstGeom prst="rect">
-            <a:avLst/>
-          </a:prstGeom>
-          <a:noFill/>
-        </p:spPr>
-        <p:txBody>
-          <a:bodyPr wrap="none" lIns="27432" rIns="27432" tIns="9144" bIns="9144" anchor="ctr">
-            <a:spAutoFit/>
-          </a:bodyPr>
-          <a:lstStyle/>
-          <a:p>
-            <a:pPr algn="ctr"/>
-            <a:r>
-              <a:rPr sz="850" b="1">
-                <a:solidFill>
-                  <a:srgbClr val="C36B31"/>
-                </a:solidFill>
-                <a:latin typeface="Arial"/>
-              </a:rPr>
-              <a:t>Chs. 5-6 / Eq. (6.1)</a:t>
-            </a:r>
-          </a:p>
-        </p:txBody>
-      </p:sp>
-      <p:sp>
-        <p:nvSpPr>
-          <p:cNvPr id="68" name="TextBox 67"/>
-          <p:cNvSpPr txBox="1"/>
-          <p:nvPr/>
-        </p:nvSpPr>
-        <p:spPr>
-          <a:xfrm>
-            <a:off x="320040" y="6327648"/>
-            <a:ext cx="11521440" cy="256032"/>
-          </a:xfrm>
-          <a:prstGeom prst="rect">
-            <a:avLst/>
-          </a:prstGeom>
-          <a:noFill/>
-        </p:spPr>
-        <p:txBody>
-          <a:bodyPr wrap="none" lIns="27432" rIns="27432" tIns="9144" bIns="9144" anchor="ctr">
-            <a:spAutoFit/>
-          </a:bodyPr>
-          <a:lstStyle/>
-          <a:p>
-            <a:pPr algn="ctr"/>
-            <a:r>
-              <a:rPr sz="1000" b="1">
-                <a:solidFill>
-                  <a:srgbClr val="18323F"/>
-                </a:solidFill>
-                <a:latin typeface="Arial"/>
-              </a:rPr>
-              <a:t>Pose updates change anchors; appearance gradients never update the tracker.</a:t>
-            </a:r>
-          </a:p>
-        </p:txBody>
-      </p:sp>
-      <p:sp>
-        <p:nvSpPr>
-          <p:cNvPr id="69" name="TextBox 68"/>
           <p:cNvSpPr txBox="1"/>
           <p:nvPr/>
         </p:nvSpPr>
@@ -48982,7 +49134,7 @@
       </p:sp>
       <p:sp>
         <p:nvSpPr>
-          <p:cNvPr id="70" name="TextBox 69"/>
+          <p:cNvPr id="68" name="TextBox 67"/>
           <p:cNvSpPr txBox="1"/>
           <p:nvPr/>
         </p:nvSpPr>
